--- a/tutor-time/question-the-headline/downloads/Question_the_Headline_Lesson_3.pptx
+++ b/tutor-time/question-the-headline/downloads/Question_the_Headline_Lesson_3.pptx
@@ -4627,7 +4627,7 @@
                 </a:solidFill>
                 <a:latin typeface="Karla"/>
               </a:rPr>
-              <a:t>Deaths per 1,000 doctors a year</a:t>
+              <a:t>Lung cancer deaths per 1,000 doctors a year</a:t>
             </a:r>
           </a:p>
         </p:txBody>
@@ -4757,7 +4757,7 @@
                 </a:solidFill>
                 <a:latin typeface="Karla"/>
               </a:rPr>
-              <a:t>From a study that followed about 40,000 British doctors from 1951. Figures for male doctors, 1951 to 1961. Doll and Hill, British Medical Journal, 1964.</a:t>
+              <a:t>From a study that followed about 40,000 British doctors from 1951. Figures for male doctors, 1951 to 1961.</a:t>
             </a:r>
           </a:p>
         </p:txBody>
@@ -10330,7 +10330,7 @@
                 </a:solidFill>
                 <a:latin typeface="Karla"/>
               </a:rPr>
-              <a:t>Their doctors study shows the more you smoke, the higher the risk.</a:t>
+              <a:t>Their study of doctors shows the more you smoke, the higher the risk.</a:t>
             </a:r>
           </a:p>
         </p:txBody>
@@ -17272,7 +17272,7 @@
                 </a:solidFill>
                 <a:latin typeface="Karla"/>
               </a:rPr>
-              <a:t>Tested on who, for how long, and by somebody with nothing to gain?</a:t>
+              <a:t>Tested on whom, for how long, and by somebody with nothing to gain?</a:t>
             </a:r>
           </a:p>
         </p:txBody>

--- a/tutor-time/question-the-headline/downloads/Question_the_Headline_Lesson_3.pptx
+++ b/tutor-time/question-the-headline/downloads/Question_the_Headline_Lesson_3.pptx
@@ -166,7 +166,7 @@
                         <a:solidFill>
                           <a:srgbClr val="262422"/>
                         </a:solidFill>
-                        <a:latin typeface="Karla"/>
+                        <a:latin typeface="Calibri"/>
                       </a:rPr>
                       <a:t>0.07</a:t>
                     </a:r>
@@ -193,7 +193,7 @@
                         <a:solidFill>
                           <a:srgbClr val="262422"/>
                         </a:solidFill>
-                        <a:latin typeface="Karla"/>
+                        <a:latin typeface="Calibri"/>
                       </a:rPr>
                       <a:t>0.57</a:t>
                     </a:r>
@@ -220,7 +220,7 @@
                         <a:solidFill>
                           <a:srgbClr val="262422"/>
                         </a:solidFill>
-                        <a:latin typeface="Karla"/>
+                        <a:latin typeface="Calibri"/>
                       </a:rPr>
                       <a:t>1.39</a:t>
                     </a:r>
@@ -247,7 +247,7 @@
                         <a:solidFill>
                           <a:srgbClr val="262422"/>
                         </a:solidFill>
-                        <a:latin typeface="Karla"/>
+                        <a:latin typeface="Calibri"/>
                       </a:rPr>
                       <a:t>2.27</a:t>
                     </a:r>
@@ -322,7 +322,7 @@
                   <a:solidFill>
                     <a:srgbClr val="262422"/>
                   </a:solidFill>
-                  <a:latin typeface="Karla"/>
+                  <a:latin typeface="Calibri"/>
                 </a:defRPr>
               </a:pPr>
             </a:p>
@@ -358,7 +358,7 @@
                     <a:solidFill>
                       <a:srgbClr val="56524B"/>
                     </a:solidFill>
-                    <a:latin typeface="Karla"/>
+                    <a:latin typeface="Calibri"/>
                   </a:rPr>
                   <a:t>Cigarettes smoked a day</a:t>
                 </a:r>
@@ -387,7 +387,7 @@
                 <a:solidFill>
                   <a:srgbClr val="262422"/>
                 </a:solidFill>
-                <a:latin typeface="Karla"/>
+                <a:latin typeface="Calibri"/>
               </a:defRPr>
             </a:pPr>
           </a:p>
@@ -425,7 +425,7 @@
           <a:solidFill>
             <a:srgbClr val="262422"/>
           </a:solidFill>
-          <a:latin typeface="Karla"/>
+          <a:latin typeface="Calibri"/>
         </a:defRPr>
       </a:pPr>
       <a:endParaRPr lang="en-US"/>
@@ -3498,7 +3498,7 @@
                 <a:solidFill>
                   <a:srgbClr val="34322F"/>
                 </a:solidFill>
-                <a:latin typeface="Karla"/>
+                <a:latin typeface="Calibri"/>
               </a:rPr>
               <a:t>TUTOR TIME  ·  QUESTION THE HEADLINE  ·  LESSON 3 OF 5</a:t>
             </a:r>
@@ -3581,11 +3581,11 @@
               </a:spcAft>
             </a:pPr>
             <a:r>
-              <a:rPr sz="3000" b="1" i="0">
+              <a:rPr sz="3000" b="0" i="0">
                 <a:solidFill>
                   <a:srgbClr val="262422"/>
                 </a:solidFill>
-                <a:latin typeface="Libre Caslon Display"/>
+                <a:latin typeface="Georgia"/>
               </a:rPr>
               <a:t>The Daily Claim</a:t>
             </a:r>
@@ -3672,7 +3672,7 @@
                 <a:solidFill>
                   <a:srgbClr val="56524B"/>
                 </a:solidFill>
-                <a:latin typeface="Karla"/>
+                <a:latin typeface="Calibri"/>
               </a:rPr>
               <a:t>NEW YORK, 1946</a:t>
             </a:r>
@@ -3715,7 +3715,7 @@
                 <a:solidFill>
                   <a:srgbClr val="56524B"/>
                 </a:solidFill>
-                <a:latin typeface="Karla"/>
+                <a:latin typeface="Calibri"/>
               </a:rPr>
               <a:t>VOLUME ONE</a:t>
             </a:r>
@@ -3758,7 +3758,7 @@
                 <a:solidFill>
                   <a:srgbClr val="56524B"/>
                 </a:solidFill>
-                <a:latin typeface="Karla"/>
+                <a:latin typeface="Calibri"/>
               </a:rPr>
               <a:t>TUTOR TIME</a:t>
             </a:r>
@@ -3841,11 +3841,11 @@
               </a:spcAft>
             </a:pPr>
             <a:r>
-              <a:rPr sz="4200" b="1" i="0">
+              <a:rPr sz="4200" b="0" i="0">
                 <a:solidFill>
                   <a:srgbClr val="262422"/>
                 </a:solidFill>
-                <a:latin typeface="Libre Caslon Display"/>
+                <a:latin typeface="Georgia"/>
               </a:rPr>
               <a:t>Doctors’ Orders</a:t>
             </a:r>
@@ -3932,7 +3932,7 @@
                 <a:solidFill>
                   <a:srgbClr val="56524B"/>
                 </a:solidFill>
-                <a:latin typeface="Karla"/>
+                <a:latin typeface="Calibri"/>
               </a:rPr>
               <a:t>A claim that was printed as true, and four pieces of evidence to test it.</a:t>
             </a:r>
@@ -3987,7 +3987,7 @@
                 <a:solidFill>
                   <a:srgbClr val="FFFDF7"/>
                 </a:solidFill>
-                <a:latin typeface="Karla"/>
+                <a:latin typeface="Calibri"/>
               </a:rPr>
               <a:t>VOLUME ONE</a:t>
             </a:r>
@@ -4055,7 +4055,7 @@
                 <a:solidFill>
                   <a:srgbClr val="8C877D"/>
                 </a:solidFill>
-                <a:latin typeface="Karla"/>
+                <a:latin typeface="Calibri"/>
               </a:rPr>
               <a:t>The Pastoral Guide</a:t>
             </a:r>
@@ -4098,7 +4098,7 @@
                 <a:solidFill>
                   <a:srgbClr val="8C877D"/>
                 </a:solidFill>
-                <a:latin typeface="Karla"/>
+                <a:latin typeface="Calibri"/>
               </a:rPr>
               <a:t>1 / 19</a:t>
             </a:r>
@@ -4203,7 +4203,7 @@
                 <a:solidFill>
                   <a:srgbClr val="34322F"/>
                 </a:solidFill>
-                <a:latin typeface="Karla"/>
+                <a:latin typeface="Calibri"/>
               </a:rPr>
               <a:t>QUESTION THE HEADLINE  ·  LESSON 3 OF 5</a:t>
             </a:r>
@@ -4258,7 +4258,7 @@
                 <a:solidFill>
                   <a:srgbClr val="FFFDF7"/>
                 </a:solidFill>
-                <a:latin typeface="Karla"/>
+                <a:latin typeface="Calibri"/>
               </a:rPr>
               <a:t>ROUND 3 OF 4</a:t>
             </a:r>
@@ -4345,7 +4345,7 @@
                 <a:solidFill>
                   <a:srgbClr val="FFFDF7"/>
                 </a:solidFill>
-                <a:latin typeface="Karla"/>
+                <a:latin typeface="Calibri"/>
               </a:rPr>
               <a:t>EVIDENCE C</a:t>
             </a:r>
@@ -4472,11 +4472,11 @@
               </a:spcAft>
             </a:pPr>
             <a:r>
-              <a:rPr sz="1800" b="1" i="0">
+              <a:rPr sz="1800" b="0" i="0">
                 <a:solidFill>
                   <a:srgbClr val="262422"/>
                 </a:solidFill>
-                <a:latin typeface="Libre Caslon Display"/>
+                <a:latin typeface="Georgia"/>
               </a:rPr>
               <a:t>The doctors’ own study</a:t>
             </a:r>
@@ -4625,7 +4625,7 @@
                 <a:solidFill>
                   <a:srgbClr val="56524B"/>
                 </a:solidFill>
-                <a:latin typeface="Karla"/>
+                <a:latin typeface="Calibri"/>
               </a:rPr>
               <a:t>Lung cancer deaths per 1,000 doctors a year</a:t>
             </a:r>
@@ -4712,7 +4712,7 @@
                 <a:solidFill>
                   <a:srgbClr val="34322F"/>
                 </a:solidFill>
-                <a:latin typeface="Karla"/>
+                <a:latin typeface="Calibri"/>
               </a:rPr>
               <a:t>ABOUT THIS</a:t>
             </a:r>
@@ -4755,7 +4755,7 @@
                 <a:solidFill>
                   <a:srgbClr val="262422"/>
                 </a:solidFill>
-                <a:latin typeface="Karla"/>
+                <a:latin typeface="Calibri"/>
               </a:rPr>
               <a:t>From a study that followed about 40,000 British doctors from 1951. Figures for male doctors, 1951 to 1961.</a:t>
             </a:r>
@@ -4798,7 +4798,7 @@
                 <a:solidFill>
                   <a:srgbClr val="8C877D"/>
                 </a:solidFill>
-                <a:latin typeface="Karla"/>
+                <a:latin typeface="Calibri"/>
               </a:rPr>
               <a:t>Source: Doll and Hill, British Medical Journal, 1964</a:t>
             </a:r>
@@ -4841,7 +4841,7 @@
                 <a:solidFill>
                   <a:srgbClr val="34322F"/>
                 </a:solidFill>
-                <a:latin typeface="Karla"/>
+                <a:latin typeface="Calibri"/>
               </a:rPr>
               <a:t>Read it as a group. Fill in the card C row on your evidence sheet, then move on the line.</a:t>
             </a:r>
@@ -4909,7 +4909,7 @@
                 <a:solidFill>
                   <a:srgbClr val="8C877D"/>
                 </a:solidFill>
-                <a:latin typeface="Karla"/>
+                <a:latin typeface="Calibri"/>
               </a:rPr>
               <a:t>The Pastoral Guide</a:t>
             </a:r>
@@ -4952,7 +4952,7 @@
                 <a:solidFill>
                   <a:srgbClr val="8C877D"/>
                 </a:solidFill>
-                <a:latin typeface="Karla"/>
+                <a:latin typeface="Calibri"/>
               </a:rPr>
               <a:t>10 / 19</a:t>
             </a:r>
@@ -5057,7 +5057,7 @@
                 <a:solidFill>
                   <a:srgbClr val="34322F"/>
                 </a:solidFill>
-                <a:latin typeface="Karla"/>
+                <a:latin typeface="Calibri"/>
               </a:rPr>
               <a:t>QUESTION THE HEADLINE  ·  LESSON 3 OF 5</a:t>
             </a:r>
@@ -5066,19 +5066,147 @@
       </p:sp>
       <p:sp>
         <p:nvSpPr>
-          <p:cNvPr id="4" name="Rounded Rectangle 3"/>
+          <p:cNvPr id="5" name="TextBox 4"/>
+          <p:cNvSpPr txBox="1"/>
+          <p:nvPr/>
+        </p:nvSpPr>
+        <p:spPr>
+          <a:xfrm>
+            <a:off x="685800" y="566928"/>
+            <a:ext cx="7772400" cy="434848"/>
+          </a:xfrm>
+          <a:prstGeom prst="rect">
+            <a:avLst/>
+          </a:prstGeom>
+          <a:noFill/>
+          <a:effectLst/>
+        </p:spPr>
+        <p:txBody>
+          <a:bodyPr wrap="square" anchor="t" lIns="0" rIns="0" tIns="0" bIns="0">
+            <a:spAutoFit/>
+          </a:bodyPr>
+          <a:lstStyle/>
+          <a:p>
+            <a:pPr algn="l">
+              <a:lnSpc>
+                <a:spcPct val="105000"/>
+              </a:lnSpc>
+              <a:spcAft>
+                <a:spcPts val="0"/>
+              </a:spcAft>
+            </a:pPr>
+            <a:r>
+              <a:rPr sz="2800" b="0" i="0">
+                <a:solidFill>
+                  <a:srgbClr val="262422"/>
+                </a:solidFill>
+                <a:latin typeface="Georgia"/>
+              </a:rPr>
+              <a:t>What do the numbers say?</a:t>
+            </a:r>
+          </a:p>
+        </p:txBody>
+      </p:sp>
+      <p:sp>
+        <p:nvSpPr>
+          <p:cNvPr id="6" name="TextBox 5"/>
+          <p:cNvSpPr txBox="1"/>
+          <p:nvPr/>
+        </p:nvSpPr>
+        <p:spPr>
+          <a:xfrm>
+            <a:off x="685800" y="1133856"/>
+            <a:ext cx="7772400" cy="274320"/>
+          </a:xfrm>
+          <a:prstGeom prst="rect">
+            <a:avLst/>
+          </a:prstGeom>
+          <a:noFill/>
+          <a:effectLst/>
+        </p:spPr>
+        <p:txBody>
+          <a:bodyPr wrap="square" anchor="t" lIns="0" rIns="0" tIns="0" bIns="0">
+            <a:spAutoFit/>
+          </a:bodyPr>
+          <a:lstStyle/>
+          <a:p>
+            <a:pPr algn="l">
+              <a:lnSpc>
+                <a:spcPct val="125000"/>
+              </a:lnSpc>
+              <a:spcAft>
+                <a:spcPts val="0"/>
+              </a:spcAft>
+            </a:pPr>
+            <a:r>
+              <a:rPr sz="1250" b="0" i="0">
+                <a:solidFill>
+                  <a:srgbClr val="56524B"/>
+                </a:solidFill>
+                <a:latin typeface="Calibri"/>
+              </a:rPr>
+              <a:t>Work them out in your group. Write your working on your evidence sheet.</a:t>
+            </a:r>
+          </a:p>
+        </p:txBody>
+      </p:sp>
+      <p:sp>
+        <p:nvSpPr>
+          <p:cNvPr id="7" name="Rectangle 6"/>
           <p:cNvSpPr/>
           <p:nvPr/>
         </p:nvSpPr>
         <p:spPr>
           <a:xfrm>
-            <a:off x="6406362" y="246888"/>
-            <a:ext cx="2051837" cy="237744"/>
-          </a:xfrm>
-          <a:prstGeom prst="roundRect">
-            <a:avLst>
-              <a:gd name="adj" fmla="val 50000"/>
-            </a:avLst>
+            <a:off x="685800" y="1481328"/>
+            <a:ext cx="7772400" cy="939545"/>
+          </a:xfrm>
+          <a:prstGeom prst="rect">
+            <a:avLst/>
+          </a:prstGeom>
+          <a:solidFill>
+            <a:srgbClr val="FFFFFF"/>
+          </a:solidFill>
+          <a:ln>
+            <a:noFill/>
+          </a:ln>
+          <a:effectLst/>
+        </p:spPr>
+        <p:style>
+          <a:lnRef idx="1">
+            <a:schemeClr val="accent1"/>
+          </a:lnRef>
+          <a:fillRef idx="3">
+            <a:schemeClr val="accent1"/>
+          </a:fillRef>
+          <a:effectRef idx="0">
+            <a:schemeClr val="accent1"/>
+          </a:effectRef>
+          <a:fontRef idx="minor">
+            <a:schemeClr val="lt1"/>
+          </a:fontRef>
+        </p:style>
+        <p:txBody>
+          <a:bodyPr rtlCol="0" anchor="ctr"/>
+          <a:lstStyle/>
+          <a:p>
+            <a:pPr algn="ctr"/>
+          </a:p>
+        </p:txBody>
+      </p:sp>
+      <p:sp>
+        <p:nvSpPr>
+          <p:cNvPr id="8" name="Oval 7"/>
+          <p:cNvSpPr/>
+          <p:nvPr/>
+        </p:nvSpPr>
+        <p:spPr>
+          <a:xfrm>
+            <a:off x="868680" y="1563624"/>
+            <a:ext cx="329184" cy="329184"/>
+          </a:xfrm>
+          <a:prstGeom prst="ellipse">
+            <a:avLst/>
           </a:prstGeom>
           <a:solidFill>
             <a:srgbClr val="34322F"/>
@@ -5103,32 +5231,66 @@
           </a:fontRef>
         </p:style>
         <p:txBody>
-          <a:bodyPr rtlCol="0" anchor="ctr" wrap="none" lIns="0" rIns="0" tIns="0" bIns="0"/>
+          <a:bodyPr rtlCol="0" anchor="ctr"/>
           <a:lstStyle/>
           <a:p>
             <a:pPr algn="ctr"/>
-            <a:r>
-              <a:rPr sz="950" b="1" spc="90">
+          </a:p>
+        </p:txBody>
+      </p:sp>
+      <p:sp>
+        <p:nvSpPr>
+          <p:cNvPr id="9" name="TextBox 8"/>
+          <p:cNvSpPr txBox="1"/>
+          <p:nvPr/>
+        </p:nvSpPr>
+        <p:spPr>
+          <a:xfrm>
+            <a:off x="868680" y="1636776"/>
+            <a:ext cx="329184" cy="182880"/>
+          </a:xfrm>
+          <a:prstGeom prst="rect">
+            <a:avLst/>
+          </a:prstGeom>
+          <a:noFill/>
+          <a:effectLst/>
+        </p:spPr>
+        <p:txBody>
+          <a:bodyPr wrap="square" anchor="t" lIns="0" rIns="0" tIns="0" bIns="0">
+            <a:spAutoFit/>
+          </a:bodyPr>
+          <a:lstStyle/>
+          <a:p>
+            <a:pPr algn="ctr">
+              <a:lnSpc>
+                <a:spcPct val="125000"/>
+              </a:lnSpc>
+              <a:spcAft>
+                <a:spcPts val="0"/>
+              </a:spcAft>
+            </a:pPr>
+            <a:r>
+              <a:rPr sz="1050" b="1" i="0">
                 <a:solidFill>
                   <a:srgbClr val="FFFDF7"/>
                 </a:solidFill>
-                <a:latin typeface="Karla"/>
-              </a:rPr>
-              <a:t>CRUNCH THE NUMBERS</a:t>
-            </a:r>
-          </a:p>
-        </p:txBody>
-      </p:sp>
-      <p:sp>
-        <p:nvSpPr>
-          <p:cNvPr id="5" name="TextBox 4"/>
-          <p:cNvSpPr txBox="1"/>
-          <p:nvPr/>
-        </p:nvSpPr>
-        <p:spPr>
-          <a:xfrm>
-            <a:off x="685800" y="566928"/>
-            <a:ext cx="7772400" cy="434848"/>
+                <a:latin typeface="Calibri"/>
+              </a:rPr>
+              <a:t>1</a:t>
+            </a:r>
+          </a:p>
+        </p:txBody>
+      </p:sp>
+      <p:sp>
+        <p:nvSpPr>
+          <p:cNvPr id="10" name="TextBox 9"/>
+          <p:cNvSpPr txBox="1"/>
+          <p:nvPr/>
+        </p:nvSpPr>
+        <p:spPr>
+          <a:xfrm>
+            <a:off x="1371600" y="1591056"/>
+            <a:ext cx="6903720" cy="720090"/>
           </a:xfrm>
           <a:prstGeom prst="rect">
             <a:avLst/>
@@ -5144,77 +5306,34 @@
           <a:p>
             <a:pPr algn="l">
               <a:lnSpc>
-                <a:spcPct val="105000"/>
-              </a:lnSpc>
-              <a:spcAft>
-                <a:spcPts val="0"/>
-              </a:spcAft>
-            </a:pPr>
-            <a:r>
-              <a:rPr sz="2800" b="1" i="0">
+                <a:spcPct val="120000"/>
+              </a:lnSpc>
+              <a:spcAft>
+                <a:spcPts val="0"/>
+              </a:spcAft>
+            </a:pPr>
+            <a:r>
+              <a:rPr sz="1500" b="1" i="0">
                 <a:solidFill>
                   <a:srgbClr val="262422"/>
                 </a:solidFill>
-                <a:latin typeface="Libre Caslon Display"/>
-              </a:rPr>
-              <a:t>What do the numbers say?</a:t>
-            </a:r>
-          </a:p>
-        </p:txBody>
-      </p:sp>
-      <p:sp>
-        <p:nvSpPr>
-          <p:cNvPr id="6" name="TextBox 5"/>
-          <p:cNvSpPr txBox="1"/>
-          <p:nvPr/>
-        </p:nvSpPr>
-        <p:spPr>
-          <a:xfrm>
-            <a:off x="685800" y="1133856"/>
-            <a:ext cx="7772400" cy="274320"/>
-          </a:xfrm>
-          <a:prstGeom prst="rect">
-            <a:avLst/>
-          </a:prstGeom>
-          <a:noFill/>
-          <a:effectLst/>
-        </p:spPr>
-        <p:txBody>
-          <a:bodyPr wrap="square" anchor="t" lIns="0" rIns="0" tIns="0" bIns="0">
-            <a:spAutoFit/>
-          </a:bodyPr>
-          <a:lstStyle/>
-          <a:p>
-            <a:pPr algn="l">
-              <a:lnSpc>
-                <a:spcPct val="125000"/>
-              </a:lnSpc>
-              <a:spcAft>
-                <a:spcPts val="0"/>
-              </a:spcAft>
-            </a:pPr>
-            <a:r>
-              <a:rPr sz="1250" b="0" i="0">
-                <a:solidFill>
-                  <a:srgbClr val="56524B"/>
-                </a:solidFill>
-                <a:latin typeface="Karla"/>
-              </a:rPr>
-              <a:t>Work them out in your group. Write your working on your evidence sheet.</a:t>
-            </a:r>
-          </a:p>
-        </p:txBody>
-      </p:sp>
-      <p:sp>
-        <p:nvSpPr>
-          <p:cNvPr id="7" name="Rectangle 6"/>
+                <a:latin typeface="Calibri"/>
+              </a:rPr>
+              <a:t>How many times higher was the lung cancer death rate for doctors who smoked 25 or more a day (2.27) than for non-smokers (0.07)?</a:t>
+            </a:r>
+          </a:p>
+        </p:txBody>
+      </p:sp>
+      <p:sp>
+        <p:nvSpPr>
+          <p:cNvPr id="11" name="Rectangle 10"/>
           <p:cNvSpPr/>
           <p:nvPr/>
         </p:nvSpPr>
         <p:spPr>
           <a:xfrm>
-            <a:off x="685800" y="1481328"/>
-            <a:ext cx="7772400" cy="939545"/>
+            <a:off x="685800" y="2585465"/>
+            <a:ext cx="7772400" cy="699516"/>
           </a:xfrm>
           <a:prstGeom prst="rect">
             <a:avLst/>
@@ -5251,13 +5370,13 @@
       </p:sp>
       <p:sp>
         <p:nvSpPr>
-          <p:cNvPr id="8" name="Oval 7"/>
+          <p:cNvPr id="12" name="Oval 11"/>
           <p:cNvSpPr/>
           <p:nvPr/>
         </p:nvSpPr>
         <p:spPr>
           <a:xfrm>
-            <a:off x="868680" y="1563624"/>
+            <a:off x="868680" y="2667761"/>
             <a:ext cx="329184" cy="329184"/>
           </a:xfrm>
           <a:prstGeom prst="ellipse">
@@ -5295,13 +5414,13 @@
       </p:sp>
       <p:sp>
         <p:nvSpPr>
-          <p:cNvPr id="9" name="TextBox 8"/>
-          <p:cNvSpPr txBox="1"/>
-          <p:nvPr/>
-        </p:nvSpPr>
-        <p:spPr>
-          <a:xfrm>
-            <a:off x="868680" y="1636776"/>
+          <p:cNvPr id="13" name="TextBox 12"/>
+          <p:cNvSpPr txBox="1"/>
+          <p:nvPr/>
+        </p:nvSpPr>
+        <p:spPr>
+          <a:xfrm>
+            <a:off x="868680" y="2740913"/>
             <a:ext cx="329184" cy="182880"/>
           </a:xfrm>
           <a:prstGeom prst="rect">
@@ -5329,23 +5448,23 @@
                 <a:solidFill>
                   <a:srgbClr val="FFFDF7"/>
                 </a:solidFill>
-                <a:latin typeface="Karla"/>
-              </a:rPr>
-              <a:t>1</a:t>
-            </a:r>
-          </a:p>
-        </p:txBody>
-      </p:sp>
-      <p:sp>
-        <p:nvSpPr>
-          <p:cNvPr id="10" name="TextBox 9"/>
-          <p:cNvSpPr txBox="1"/>
-          <p:nvPr/>
-        </p:nvSpPr>
-        <p:spPr>
-          <a:xfrm>
-            <a:off x="1371600" y="1591056"/>
-            <a:ext cx="6903720" cy="720090"/>
+                <a:latin typeface="Calibri"/>
+              </a:rPr>
+              <a:t>2</a:t>
+            </a:r>
+          </a:p>
+        </p:txBody>
+      </p:sp>
+      <p:sp>
+        <p:nvSpPr>
+          <p:cNvPr id="14" name="TextBox 13"/>
+          <p:cNvSpPr txBox="1"/>
+          <p:nvPr/>
+        </p:nvSpPr>
+        <p:spPr>
+          <a:xfrm>
+            <a:off x="1371600" y="2695194"/>
+            <a:ext cx="6903720" cy="480060"/>
           </a:xfrm>
           <a:prstGeom prst="rect">
             <a:avLst/>
@@ -5372,23 +5491,23 @@
                 <a:solidFill>
                   <a:srgbClr val="262422"/>
                 </a:solidFill>
-                <a:latin typeface="Karla"/>
-              </a:rPr>
-              <a:t>How many times higher was the lung cancer death rate for doctors who smoked 25 or more a day (2.27) than for non-smokers (0.07)?</a:t>
-            </a:r>
-          </a:p>
-        </p:txBody>
-      </p:sp>
-      <p:sp>
-        <p:nvSpPr>
-          <p:cNvPr id="11" name="Rectangle 10"/>
+                <a:latin typeface="Calibri"/>
+              </a:rPr>
+              <a:t>What happens to the death rate every time the number of cigarettes goes up a band?</a:t>
+            </a:r>
+          </a:p>
+        </p:txBody>
+      </p:sp>
+      <p:sp>
+        <p:nvSpPr>
+          <p:cNvPr id="15" name="Rectangle 14"/>
           <p:cNvSpPr/>
           <p:nvPr/>
         </p:nvSpPr>
         <p:spPr>
           <a:xfrm>
-            <a:off x="685800" y="2585465"/>
-            <a:ext cx="7772400" cy="699516"/>
+            <a:off x="685800" y="3449574"/>
+            <a:ext cx="7772400" cy="939545"/>
           </a:xfrm>
           <a:prstGeom prst="rect">
             <a:avLst/>
@@ -5425,13 +5544,13 @@
       </p:sp>
       <p:sp>
         <p:nvSpPr>
-          <p:cNvPr id="12" name="Oval 11"/>
+          <p:cNvPr id="16" name="Oval 15"/>
           <p:cNvSpPr/>
           <p:nvPr/>
         </p:nvSpPr>
         <p:spPr>
           <a:xfrm>
-            <a:off x="868680" y="2667761"/>
+            <a:off x="868680" y="3531870"/>
             <a:ext cx="329184" cy="329184"/>
           </a:xfrm>
           <a:prstGeom prst="ellipse">
@@ -5469,180 +5588,6 @@
       </p:sp>
       <p:sp>
         <p:nvSpPr>
-          <p:cNvPr id="13" name="TextBox 12"/>
-          <p:cNvSpPr txBox="1"/>
-          <p:nvPr/>
-        </p:nvSpPr>
-        <p:spPr>
-          <a:xfrm>
-            <a:off x="868680" y="2740913"/>
-            <a:ext cx="329184" cy="182880"/>
-          </a:xfrm>
-          <a:prstGeom prst="rect">
-            <a:avLst/>
-          </a:prstGeom>
-          <a:noFill/>
-          <a:effectLst/>
-        </p:spPr>
-        <p:txBody>
-          <a:bodyPr wrap="square" anchor="t" lIns="0" rIns="0" tIns="0" bIns="0">
-            <a:spAutoFit/>
-          </a:bodyPr>
-          <a:lstStyle/>
-          <a:p>
-            <a:pPr algn="ctr">
-              <a:lnSpc>
-                <a:spcPct val="125000"/>
-              </a:lnSpc>
-              <a:spcAft>
-                <a:spcPts val="0"/>
-              </a:spcAft>
-            </a:pPr>
-            <a:r>
-              <a:rPr sz="1050" b="1" i="0">
-                <a:solidFill>
-                  <a:srgbClr val="FFFDF7"/>
-                </a:solidFill>
-                <a:latin typeface="Karla"/>
-              </a:rPr>
-              <a:t>2</a:t>
-            </a:r>
-          </a:p>
-        </p:txBody>
-      </p:sp>
-      <p:sp>
-        <p:nvSpPr>
-          <p:cNvPr id="14" name="TextBox 13"/>
-          <p:cNvSpPr txBox="1"/>
-          <p:nvPr/>
-        </p:nvSpPr>
-        <p:spPr>
-          <a:xfrm>
-            <a:off x="1371600" y="2695194"/>
-            <a:ext cx="6903720" cy="480060"/>
-          </a:xfrm>
-          <a:prstGeom prst="rect">
-            <a:avLst/>
-          </a:prstGeom>
-          <a:noFill/>
-          <a:effectLst/>
-        </p:spPr>
-        <p:txBody>
-          <a:bodyPr wrap="square" anchor="t" lIns="0" rIns="0" tIns="0" bIns="0">
-            <a:spAutoFit/>
-          </a:bodyPr>
-          <a:lstStyle/>
-          <a:p>
-            <a:pPr algn="l">
-              <a:lnSpc>
-                <a:spcPct val="120000"/>
-              </a:lnSpc>
-              <a:spcAft>
-                <a:spcPts val="0"/>
-              </a:spcAft>
-            </a:pPr>
-            <a:r>
-              <a:rPr sz="1500" b="1" i="0">
-                <a:solidFill>
-                  <a:srgbClr val="262422"/>
-                </a:solidFill>
-                <a:latin typeface="Karla"/>
-              </a:rPr>
-              <a:t>What happens to the death rate every time the number of cigarettes goes up a band?</a:t>
-            </a:r>
-          </a:p>
-        </p:txBody>
-      </p:sp>
-      <p:sp>
-        <p:nvSpPr>
-          <p:cNvPr id="15" name="Rectangle 14"/>
-          <p:cNvSpPr/>
-          <p:nvPr/>
-        </p:nvSpPr>
-        <p:spPr>
-          <a:xfrm>
-            <a:off x="685800" y="3449574"/>
-            <a:ext cx="7772400" cy="939545"/>
-          </a:xfrm>
-          <a:prstGeom prst="rect">
-            <a:avLst/>
-          </a:prstGeom>
-          <a:solidFill>
-            <a:srgbClr val="FFFFFF"/>
-          </a:solidFill>
-          <a:ln>
-            <a:noFill/>
-          </a:ln>
-          <a:effectLst/>
-        </p:spPr>
-        <p:style>
-          <a:lnRef idx="1">
-            <a:schemeClr val="accent1"/>
-          </a:lnRef>
-          <a:fillRef idx="3">
-            <a:schemeClr val="accent1"/>
-          </a:fillRef>
-          <a:effectRef idx="0">
-            <a:schemeClr val="accent1"/>
-          </a:effectRef>
-          <a:fontRef idx="minor">
-            <a:schemeClr val="lt1"/>
-          </a:fontRef>
-        </p:style>
-        <p:txBody>
-          <a:bodyPr rtlCol="0" anchor="ctr"/>
-          <a:lstStyle/>
-          <a:p>
-            <a:pPr algn="ctr"/>
-          </a:p>
-        </p:txBody>
-      </p:sp>
-      <p:sp>
-        <p:nvSpPr>
-          <p:cNvPr id="16" name="Oval 15"/>
-          <p:cNvSpPr/>
-          <p:nvPr/>
-        </p:nvSpPr>
-        <p:spPr>
-          <a:xfrm>
-            <a:off x="868680" y="3531870"/>
-            <a:ext cx="329184" cy="329184"/>
-          </a:xfrm>
-          <a:prstGeom prst="ellipse">
-            <a:avLst/>
-          </a:prstGeom>
-          <a:solidFill>
-            <a:srgbClr val="34322F"/>
-          </a:solidFill>
-          <a:ln>
-            <a:noFill/>
-          </a:ln>
-          <a:effectLst/>
-        </p:spPr>
-        <p:style>
-          <a:lnRef idx="1">
-            <a:schemeClr val="accent1"/>
-          </a:lnRef>
-          <a:fillRef idx="3">
-            <a:schemeClr val="accent1"/>
-          </a:fillRef>
-          <a:effectRef idx="0">
-            <a:schemeClr val="accent1"/>
-          </a:effectRef>
-          <a:fontRef idx="minor">
-            <a:schemeClr val="lt1"/>
-          </a:fontRef>
-        </p:style>
-        <p:txBody>
-          <a:bodyPr rtlCol="0" anchor="ctr"/>
-          <a:lstStyle/>
-          <a:p>
-            <a:pPr algn="ctr"/>
-          </a:p>
-        </p:txBody>
-      </p:sp>
-      <p:sp>
-        <p:nvSpPr>
           <p:cNvPr id="17" name="TextBox 16"/>
           <p:cNvSpPr txBox="1"/>
           <p:nvPr/>
@@ -5677,7 +5622,7 @@
                 <a:solidFill>
                   <a:srgbClr val="FFFDF7"/>
                 </a:solidFill>
-                <a:latin typeface="Karla"/>
+                <a:latin typeface="Calibri"/>
               </a:rPr>
               <a:t>3</a:t>
             </a:r>
@@ -5720,7 +5665,7 @@
                 <a:solidFill>
                   <a:srgbClr val="262422"/>
                 </a:solidFill>
-                <a:latin typeface="Karla"/>
+                <a:latin typeface="Calibri"/>
               </a:rPr>
               <a:t>The rates are per 1,000 doctors a year. Out of 1,000 doctors who smoked 25 or more a day, about how many would die of lung cancer over ten years?</a:t>
             </a:r>
@@ -5788,7 +5733,7 @@
                 <a:solidFill>
                   <a:srgbClr val="8C877D"/>
                 </a:solidFill>
-                <a:latin typeface="Karla"/>
+                <a:latin typeface="Calibri"/>
               </a:rPr>
               <a:t>The Pastoral Guide</a:t>
             </a:r>
@@ -5831,7 +5776,7 @@
                 <a:solidFill>
                   <a:srgbClr val="8C877D"/>
                 </a:solidFill>
-                <a:latin typeface="Karla"/>
+                <a:latin typeface="Calibri"/>
               </a:rPr>
               <a:t>11 / 19</a:t>
             </a:r>
@@ -5936,7 +5881,7 @@
                 <a:solidFill>
                   <a:srgbClr val="34322F"/>
                 </a:solidFill>
-                <a:latin typeface="Karla"/>
+                <a:latin typeface="Calibri"/>
               </a:rPr>
               <a:t>QUESTION THE HEADLINE  ·  LESSON 3 OF 5</a:t>
             </a:r>
@@ -5991,7 +5936,7 @@
                 <a:solidFill>
                   <a:srgbClr val="FFFDF7"/>
                 </a:solidFill>
-                <a:latin typeface="Karla"/>
+                <a:latin typeface="Calibri"/>
               </a:rPr>
               <a:t>THE ANSWERS</a:t>
             </a:r>
@@ -6030,11 +5975,11 @@
               </a:spcAft>
             </a:pPr>
             <a:r>
-              <a:rPr sz="2800" b="1" i="0">
+              <a:rPr sz="2800" b="0" i="0">
                 <a:solidFill>
                   <a:srgbClr val="262422"/>
                 </a:solidFill>
-                <a:latin typeface="Libre Caslon Display"/>
+                <a:latin typeface="Georgia"/>
               </a:rPr>
               <a:t>Check your working</a:t>
             </a:r>
@@ -6077,7 +6022,7 @@
                 <a:solidFill>
                   <a:srgbClr val="56524B"/>
                 </a:solidFill>
-                <a:latin typeface="Karla"/>
+                <a:latin typeface="Calibri"/>
               </a:rPr>
               <a:t>Mark your own. A different method that gets the same answer is fine.</a:t>
             </a:r>
@@ -6208,7 +6153,7 @@
                 <a:solidFill>
                   <a:srgbClr val="FFFDF7"/>
                 </a:solidFill>
-                <a:latin typeface="Karla"/>
+                <a:latin typeface="Calibri"/>
               </a:rPr>
               <a:t>1</a:t>
             </a:r>
@@ -6251,7 +6196,7 @@
                 <a:solidFill>
                   <a:srgbClr val="262422"/>
                 </a:solidFill>
-                <a:latin typeface="Karla"/>
+                <a:latin typeface="Calibri"/>
               </a:rPr>
               <a:t>How many times higher was the lung cancer death rate for doctors who smoked 25 or more a day (2.27) than for non-smokers (0.07)?</a:t>
             </a:r>
@@ -6294,7 +6239,7 @@
                 <a:solidFill>
                   <a:srgbClr val="34322F"/>
                 </a:solidFill>
-                <a:latin typeface="Karla"/>
+                <a:latin typeface="Calibri"/>
               </a:rPr>
               <a:t>About 32 times (2.27 ÷ 0.07 = 32.4).</a:t>
             </a:r>
@@ -6425,7 +6370,7 @@
                 <a:solidFill>
                   <a:srgbClr val="FFFDF7"/>
                 </a:solidFill>
-                <a:latin typeface="Karla"/>
+                <a:latin typeface="Calibri"/>
               </a:rPr>
               <a:t>2</a:t>
             </a:r>
@@ -6468,7 +6413,7 @@
                 <a:solidFill>
                   <a:srgbClr val="262422"/>
                 </a:solidFill>
-                <a:latin typeface="Karla"/>
+                <a:latin typeface="Calibri"/>
               </a:rPr>
               <a:t>What happens to the death rate every time the number of cigarettes goes up a band?</a:t>
             </a:r>
@@ -6511,7 +6456,7 @@
                 <a:solidFill>
                   <a:srgbClr val="34322F"/>
                 </a:solidFill>
-                <a:latin typeface="Karla"/>
+                <a:latin typeface="Calibri"/>
               </a:rPr>
               <a:t>It rises every time: 0.07, then 0.57, then 1.39, then 2.27.</a:t>
             </a:r>
@@ -6642,7 +6587,7 @@
                 <a:solidFill>
                   <a:srgbClr val="FFFDF7"/>
                 </a:solidFill>
-                <a:latin typeface="Karla"/>
+                <a:latin typeface="Calibri"/>
               </a:rPr>
               <a:t>3</a:t>
             </a:r>
@@ -6685,7 +6630,7 @@
                 <a:solidFill>
                   <a:srgbClr val="262422"/>
                 </a:solidFill>
-                <a:latin typeface="Karla"/>
+                <a:latin typeface="Calibri"/>
               </a:rPr>
               <a:t>The rates are per 1,000 doctors a year. Out of 1,000 doctors who smoked 25 or more a day, about how many would die of lung cancer over ten years?</a:t>
             </a:r>
@@ -6728,7 +6673,7 @@
                 <a:solidFill>
                   <a:srgbClr val="34322F"/>
                 </a:solidFill>
-                <a:latin typeface="Karla"/>
+                <a:latin typeface="Calibri"/>
               </a:rPr>
               <a:t>About 23 (2.27 × 10). For non-smokers it would be fewer than 1.</a:t>
             </a:r>
@@ -6796,7 +6741,7 @@
                 <a:solidFill>
                   <a:srgbClr val="8C877D"/>
                 </a:solidFill>
-                <a:latin typeface="Karla"/>
+                <a:latin typeface="Calibri"/>
               </a:rPr>
               <a:t>The Pastoral Guide</a:t>
             </a:r>
@@ -6839,7 +6784,7 @@
                 <a:solidFill>
                   <a:srgbClr val="8C877D"/>
                 </a:solidFill>
-                <a:latin typeface="Karla"/>
+                <a:latin typeface="Calibri"/>
               </a:rPr>
               <a:t>12 / 19</a:t>
             </a:r>
@@ -6944,7 +6889,7 @@
                 <a:solidFill>
                   <a:srgbClr val="34322F"/>
                 </a:solidFill>
-                <a:latin typeface="Karla"/>
+                <a:latin typeface="Calibri"/>
               </a:rPr>
               <a:t>QUESTION THE HEADLINE  ·  LESSON 3 OF 5</a:t>
             </a:r>
@@ -6999,7 +6944,7 @@
                 <a:solidFill>
                   <a:srgbClr val="FFFDF7"/>
                 </a:solidFill>
-                <a:latin typeface="Karla"/>
+                <a:latin typeface="Calibri"/>
               </a:rPr>
               <a:t>ROUND 4 OF 4</a:t>
             </a:r>
@@ -7086,7 +7031,7 @@
                 <a:solidFill>
                   <a:srgbClr val="FFFDF7"/>
                 </a:solidFill>
-                <a:latin typeface="Karla"/>
+                <a:latin typeface="Calibri"/>
               </a:rPr>
               <a:t>EVIDENCE D</a:t>
             </a:r>
@@ -7213,11 +7158,11 @@
               </a:spcAft>
             </a:pPr>
             <a:r>
-              <a:rPr sz="2200" b="1" i="0">
+              <a:rPr sz="2200" b="0" i="0">
                 <a:solidFill>
                   <a:srgbClr val="262422"/>
                 </a:solidFill>
-                <a:latin typeface="Libre Caslon Display"/>
+                <a:latin typeface="Georgia"/>
               </a:rPr>
               <a:t>The scientists</a:t>
             </a:r>
@@ -7303,7 +7248,7 @@
                 <a:solidFill>
                   <a:srgbClr val="8C877D"/>
                 </a:solidFill>
-                <a:latin typeface="Karla"/>
+                <a:latin typeface="Calibri"/>
               </a:rPr>
               <a:t>Source: Doll and Hill, British Medical Journal, 1950</a:t>
             </a:r>
@@ -7346,7 +7291,7 @@
                 <a:solidFill>
                   <a:srgbClr val="34322F"/>
                 </a:solidFill>
-                <a:latin typeface="Karla"/>
+                <a:latin typeface="Calibri"/>
               </a:rPr>
               <a:t>Read it as a group. Fill in the card D row on your evidence sheet, then move on the line.</a:t>
             </a:r>
@@ -7414,7 +7359,7 @@
                 <a:solidFill>
                   <a:srgbClr val="8C877D"/>
                 </a:solidFill>
-                <a:latin typeface="Karla"/>
+                <a:latin typeface="Calibri"/>
               </a:rPr>
               <a:t>The Pastoral Guide</a:t>
             </a:r>
@@ -7457,7 +7402,7 @@
                 <a:solidFill>
                   <a:srgbClr val="8C877D"/>
                 </a:solidFill>
-                <a:latin typeface="Karla"/>
+                <a:latin typeface="Calibri"/>
               </a:rPr>
               <a:t>13 / 19</a:t>
             </a:r>
@@ -7562,7 +7507,7 @@
                 <a:solidFill>
                   <a:srgbClr val="34322F"/>
                 </a:solidFill>
-                <a:latin typeface="Karla"/>
+                <a:latin typeface="Calibri"/>
               </a:rPr>
               <a:t>QUESTION THE HEADLINE  ·  LESSON 3 OF 5</a:t>
             </a:r>
@@ -7571,19 +7516,147 @@
       </p:sp>
       <p:sp>
         <p:nvSpPr>
-          <p:cNvPr id="4" name="Rounded Rectangle 3"/>
+          <p:cNvPr id="5" name="TextBox 4"/>
+          <p:cNvSpPr txBox="1"/>
+          <p:nvPr/>
+        </p:nvSpPr>
+        <p:spPr>
+          <a:xfrm>
+            <a:off x="685800" y="566928"/>
+            <a:ext cx="7772400" cy="434848"/>
+          </a:xfrm>
+          <a:prstGeom prst="rect">
+            <a:avLst/>
+          </a:prstGeom>
+          <a:noFill/>
+          <a:effectLst/>
+        </p:spPr>
+        <p:txBody>
+          <a:bodyPr wrap="square" anchor="t" lIns="0" rIns="0" tIns="0" bIns="0">
+            <a:spAutoFit/>
+          </a:bodyPr>
+          <a:lstStyle/>
+          <a:p>
+            <a:pPr algn="l">
+              <a:lnSpc>
+                <a:spcPct val="105000"/>
+              </a:lnSpc>
+              <a:spcAft>
+                <a:spcPts val="0"/>
+              </a:spcAft>
+            </a:pPr>
+            <a:r>
+              <a:rPr sz="2800" b="0" i="0">
+                <a:solidFill>
+                  <a:srgbClr val="262422"/>
+                </a:solidFill>
+                <a:latin typeface="Georgia"/>
+              </a:rPr>
+              <a:t>Write the real front page</a:t>
+            </a:r>
+          </a:p>
+        </p:txBody>
+      </p:sp>
+      <p:sp>
+        <p:nvSpPr>
+          <p:cNvPr id="6" name="TextBox 5"/>
+          <p:cNvSpPr txBox="1"/>
+          <p:nvPr/>
+        </p:nvSpPr>
+        <p:spPr>
+          <a:xfrm>
+            <a:off x="685800" y="1115568"/>
+            <a:ext cx="7772400" cy="274320"/>
+          </a:xfrm>
+          <a:prstGeom prst="rect">
+            <a:avLst/>
+          </a:prstGeom>
+          <a:noFill/>
+          <a:effectLst/>
+        </p:spPr>
+        <p:txBody>
+          <a:bodyPr wrap="square" anchor="t" lIns="0" rIns="0" tIns="0" bIns="0">
+            <a:spAutoFit/>
+          </a:bodyPr>
+          <a:lstStyle/>
+          <a:p>
+            <a:pPr algn="l">
+              <a:lnSpc>
+                <a:spcPct val="125000"/>
+              </a:lnSpc>
+              <a:spcAft>
+                <a:spcPts val="0"/>
+              </a:spcAft>
+            </a:pPr>
+            <a:r>
+              <a:rPr sz="1300" b="0" i="0">
+                <a:solidFill>
+                  <a:srgbClr val="56524B"/>
+                </a:solidFill>
+                <a:latin typeface="Calibri"/>
+              </a:rPr>
+              <a:t>On your front page sheet, on your own or with one partner.</a:t>
+            </a:r>
+          </a:p>
+        </p:txBody>
+      </p:sp>
+      <p:sp>
+        <p:nvSpPr>
+          <p:cNvPr id="7" name="Rectangle 6"/>
           <p:cNvSpPr/>
           <p:nvPr/>
         </p:nvSpPr>
         <p:spPr>
           <a:xfrm>
-            <a:off x="7280579" y="246888"/>
-            <a:ext cx="1177620" cy="237744"/>
-          </a:xfrm>
-          <a:prstGeom prst="roundRect">
-            <a:avLst>
-              <a:gd name="adj" fmla="val 50000"/>
-            </a:avLst>
+            <a:off x="685800" y="1499616"/>
+            <a:ext cx="7772400" cy="676656"/>
+          </a:xfrm>
+          <a:prstGeom prst="rect">
+            <a:avLst/>
+          </a:prstGeom>
+          <a:solidFill>
+            <a:srgbClr val="FFFDF7"/>
+          </a:solidFill>
+          <a:ln>
+            <a:noFill/>
+          </a:ln>
+          <a:effectLst/>
+        </p:spPr>
+        <p:style>
+          <a:lnRef idx="1">
+            <a:schemeClr val="accent1"/>
+          </a:lnRef>
+          <a:fillRef idx="3">
+            <a:schemeClr val="accent1"/>
+          </a:fillRef>
+          <a:effectRef idx="0">
+            <a:schemeClr val="accent1"/>
+          </a:effectRef>
+          <a:fontRef idx="minor">
+            <a:schemeClr val="lt1"/>
+          </a:fontRef>
+        </p:style>
+        <p:txBody>
+          <a:bodyPr rtlCol="0" anchor="ctr"/>
+          <a:lstStyle/>
+          <a:p>
+            <a:pPr algn="ctr"/>
+          </a:p>
+        </p:txBody>
+      </p:sp>
+      <p:sp>
+        <p:nvSpPr>
+          <p:cNvPr id="8" name="Oval 7"/>
+          <p:cNvSpPr/>
+          <p:nvPr/>
+        </p:nvSpPr>
+        <p:spPr>
+          <a:xfrm>
+            <a:off x="868680" y="1636775"/>
+            <a:ext cx="402336" cy="402336"/>
+          </a:xfrm>
+          <a:prstGeom prst="ellipse">
+            <a:avLst/>
           </a:prstGeom>
           <a:solidFill>
             <a:srgbClr val="34322F"/>
@@ -7608,32 +7681,66 @@
           </a:fontRef>
         </p:style>
         <p:txBody>
-          <a:bodyPr rtlCol="0" anchor="ctr" wrap="none" lIns="0" rIns="0" tIns="0" bIns="0"/>
+          <a:bodyPr rtlCol="0" anchor="ctr"/>
           <a:lstStyle/>
           <a:p>
             <a:pPr algn="ctr"/>
-            <a:r>
-              <a:rPr sz="950" b="1" spc="90">
+          </a:p>
+        </p:txBody>
+      </p:sp>
+      <p:sp>
+        <p:nvSpPr>
+          <p:cNvPr id="9" name="TextBox 8"/>
+          <p:cNvSpPr txBox="1"/>
+          <p:nvPr/>
+        </p:nvSpPr>
+        <p:spPr>
+          <a:xfrm>
+            <a:off x="868680" y="1732787"/>
+            <a:ext cx="402336" cy="219456"/>
+          </a:xfrm>
+          <a:prstGeom prst="rect">
+            <a:avLst/>
+          </a:prstGeom>
+          <a:noFill/>
+          <a:effectLst/>
+        </p:spPr>
+        <p:txBody>
+          <a:bodyPr wrap="square" anchor="t" lIns="0" rIns="0" tIns="0" bIns="0">
+            <a:spAutoFit/>
+          </a:bodyPr>
+          <a:lstStyle/>
+          <a:p>
+            <a:pPr algn="ctr">
+              <a:lnSpc>
+                <a:spcPct val="125000"/>
+              </a:lnSpc>
+              <a:spcAft>
+                <a:spcPts val="0"/>
+              </a:spcAft>
+            </a:pPr>
+            <a:r>
+              <a:rPr sz="1150" b="1" i="0">
                 <a:solidFill>
                   <a:srgbClr val="FFFDF7"/>
                 </a:solidFill>
-                <a:latin typeface="Karla"/>
-              </a:rPr>
-              <a:t>YOUR TURN</a:t>
-            </a:r>
-          </a:p>
-        </p:txBody>
-      </p:sp>
-      <p:sp>
-        <p:nvSpPr>
-          <p:cNvPr id="5" name="TextBox 4"/>
-          <p:cNvSpPr txBox="1"/>
-          <p:nvPr/>
-        </p:nvSpPr>
-        <p:spPr>
-          <a:xfrm>
-            <a:off x="685800" y="566928"/>
-            <a:ext cx="7772400" cy="434848"/>
+                <a:latin typeface="Calibri"/>
+              </a:rPr>
+              <a:t>1</a:t>
+            </a:r>
+          </a:p>
+        </p:txBody>
+      </p:sp>
+      <p:sp>
+        <p:nvSpPr>
+          <p:cNvPr id="10" name="TextBox 9"/>
+          <p:cNvSpPr txBox="1"/>
+          <p:nvPr/>
+        </p:nvSpPr>
+        <p:spPr>
+          <a:xfrm>
+            <a:off x="1417320" y="1600200"/>
+            <a:ext cx="6821424" cy="237744"/>
           </a:xfrm>
           <a:prstGeom prst="rect">
             <a:avLst/>
@@ -7649,34 +7756,34 @@
           <a:p>
             <a:pPr algn="l">
               <a:lnSpc>
-                <a:spcPct val="105000"/>
-              </a:lnSpc>
-              <a:spcAft>
-                <a:spcPts val="0"/>
-              </a:spcAft>
-            </a:pPr>
-            <a:r>
-              <a:rPr sz="2800" b="1" i="0">
-                <a:solidFill>
-                  <a:srgbClr val="262422"/>
-                </a:solidFill>
-                <a:latin typeface="Libre Caslon Display"/>
-              </a:rPr>
-              <a:t>Write the real front page</a:t>
-            </a:r>
-          </a:p>
-        </p:txBody>
-      </p:sp>
-      <p:sp>
-        <p:nvSpPr>
-          <p:cNvPr id="6" name="TextBox 5"/>
-          <p:cNvSpPr txBox="1"/>
-          <p:nvPr/>
-        </p:nvSpPr>
-        <p:spPr>
-          <a:xfrm>
-            <a:off x="685800" y="1115568"/>
-            <a:ext cx="7772400" cy="274320"/>
+                <a:spcPct val="125000"/>
+              </a:lnSpc>
+              <a:spcAft>
+                <a:spcPts val="0"/>
+              </a:spcAft>
+            </a:pPr>
+            <a:r>
+              <a:rPr sz="1300" b="0" i="0">
+                <a:solidFill>
+                  <a:srgbClr val="34322F"/>
+                </a:solidFill>
+                <a:latin typeface="Georgia"/>
+              </a:rPr>
+              <a:t>A headline that is true to the evidence</a:t>
+            </a:r>
+          </a:p>
+        </p:txBody>
+      </p:sp>
+      <p:sp>
+        <p:nvSpPr>
+          <p:cNvPr id="11" name="TextBox 10"/>
+          <p:cNvSpPr txBox="1"/>
+          <p:nvPr/>
+        </p:nvSpPr>
+        <p:spPr>
+          <a:xfrm>
+            <a:off x="1417320" y="1847088"/>
+            <a:ext cx="6821424" cy="256031"/>
           </a:xfrm>
           <a:prstGeom prst="rect">
             <a:avLst/>
@@ -7699,26 +7806,26 @@
               </a:spcAft>
             </a:pPr>
             <a:r>
-              <a:rPr sz="1300" b="0" i="0">
+              <a:rPr sz="1100" b="0" i="0">
                 <a:solidFill>
                   <a:srgbClr val="56524B"/>
                 </a:solidFill>
-                <a:latin typeface="Karla"/>
-              </a:rPr>
-              <a:t>On your front page sheet, on your own or with one partner.</a:t>
-            </a:r>
-          </a:p>
-        </p:txBody>
-      </p:sp>
-      <p:sp>
-        <p:nvSpPr>
-          <p:cNvPr id="7" name="Rectangle 6"/>
+                <a:latin typeface="Calibri"/>
+              </a:rPr>
+              <a:t>No bigger than the evidence. If you are not sure, the headline can say so.</a:t>
+            </a:r>
+          </a:p>
+        </p:txBody>
+      </p:sp>
+      <p:sp>
+        <p:nvSpPr>
+          <p:cNvPr id="12" name="Rectangle 11"/>
           <p:cNvSpPr/>
           <p:nvPr/>
         </p:nvSpPr>
         <p:spPr>
           <a:xfrm>
-            <a:off x="685800" y="1499616"/>
+            <a:off x="685800" y="2304288"/>
             <a:ext cx="7772400" cy="676656"/>
           </a:xfrm>
           <a:prstGeom prst="rect">
@@ -7756,13 +7863,13 @@
       </p:sp>
       <p:sp>
         <p:nvSpPr>
-          <p:cNvPr id="8" name="Oval 7"/>
+          <p:cNvPr id="13" name="Oval 12"/>
           <p:cNvSpPr/>
           <p:nvPr/>
         </p:nvSpPr>
         <p:spPr>
           <a:xfrm>
-            <a:off x="868680" y="1636775"/>
+            <a:off x="868680" y="2441448"/>
             <a:ext cx="402336" cy="402336"/>
           </a:xfrm>
           <a:prstGeom prst="ellipse">
@@ -7800,13 +7907,13 @@
       </p:sp>
       <p:sp>
         <p:nvSpPr>
-          <p:cNvPr id="9" name="TextBox 8"/>
-          <p:cNvSpPr txBox="1"/>
-          <p:nvPr/>
-        </p:nvSpPr>
-        <p:spPr>
-          <a:xfrm>
-            <a:off x="868680" y="1732787"/>
+          <p:cNvPr id="14" name="TextBox 13"/>
+          <p:cNvSpPr txBox="1"/>
+          <p:nvPr/>
+        </p:nvSpPr>
+        <p:spPr>
+          <a:xfrm>
+            <a:off x="868680" y="2537460"/>
             <a:ext cx="402336" cy="219456"/>
           </a:xfrm>
           <a:prstGeom prst="rect">
@@ -7834,22 +7941,22 @@
                 <a:solidFill>
                   <a:srgbClr val="FFFDF7"/>
                 </a:solidFill>
-                <a:latin typeface="Karla"/>
-              </a:rPr>
-              <a:t>1</a:t>
-            </a:r>
-          </a:p>
-        </p:txBody>
-      </p:sp>
-      <p:sp>
-        <p:nvSpPr>
-          <p:cNvPr id="10" name="TextBox 9"/>
-          <p:cNvSpPr txBox="1"/>
-          <p:nvPr/>
-        </p:nvSpPr>
-        <p:spPr>
-          <a:xfrm>
-            <a:off x="1417320" y="1600200"/>
+                <a:latin typeface="Calibri"/>
+              </a:rPr>
+              <a:t>2</a:t>
+            </a:r>
+          </a:p>
+        </p:txBody>
+      </p:sp>
+      <p:sp>
+        <p:nvSpPr>
+          <p:cNvPr id="15" name="TextBox 14"/>
+          <p:cNvSpPr txBox="1"/>
+          <p:nvPr/>
+        </p:nvSpPr>
+        <p:spPr>
+          <a:xfrm>
+            <a:off x="1417320" y="2404872"/>
             <a:ext cx="6821424" cy="237744"/>
           </a:xfrm>
           <a:prstGeom prst="rect">
@@ -7873,26 +7980,26 @@
               </a:spcAft>
             </a:pPr>
             <a:r>
-              <a:rPr sz="1300" b="1" i="0">
+              <a:rPr sz="1300" b="0" i="0">
                 <a:solidFill>
                   <a:srgbClr val="34322F"/>
                 </a:solidFill>
-                <a:latin typeface="Libre Caslon Display"/>
-              </a:rPr>
-              <a:t>A headline that is true to the evidence</a:t>
-            </a:r>
-          </a:p>
-        </p:txBody>
-      </p:sp>
-      <p:sp>
-        <p:nvSpPr>
-          <p:cNvPr id="11" name="TextBox 10"/>
-          <p:cNvSpPr txBox="1"/>
-          <p:nvPr/>
-        </p:nvSpPr>
-        <p:spPr>
-          <a:xfrm>
-            <a:off x="1417320" y="1847088"/>
+                <a:latin typeface="Georgia"/>
+              </a:rPr>
+              <a:t>One line under it that sums up the story</a:t>
+            </a:r>
+          </a:p>
+        </p:txBody>
+      </p:sp>
+      <p:sp>
+        <p:nvSpPr>
+          <p:cNvPr id="16" name="TextBox 15"/>
+          <p:cNvSpPr txBox="1"/>
+          <p:nvPr/>
+        </p:nvSpPr>
+        <p:spPr>
+          <a:xfrm>
+            <a:off x="1417320" y="2651760"/>
             <a:ext cx="6821424" cy="256031"/>
           </a:xfrm>
           <a:prstGeom prst="rect">
@@ -7920,22 +8027,22 @@
                 <a:solidFill>
                   <a:srgbClr val="56524B"/>
                 </a:solidFill>
-                <a:latin typeface="Karla"/>
-              </a:rPr>
-              <a:t>No bigger than the evidence. If you are not sure, the headline can say so.</a:t>
-            </a:r>
-          </a:p>
-        </p:txBody>
-      </p:sp>
-      <p:sp>
-        <p:nvSpPr>
-          <p:cNvPr id="12" name="Rectangle 11"/>
+                <a:latin typeface="Calibri"/>
+              </a:rPr>
+              <a:t>Who made the claim, and what they stood to gain.</a:t>
+            </a:r>
+          </a:p>
+        </p:txBody>
+      </p:sp>
+      <p:sp>
+        <p:nvSpPr>
+          <p:cNvPr id="17" name="Rectangle 16"/>
           <p:cNvSpPr/>
           <p:nvPr/>
         </p:nvSpPr>
         <p:spPr>
           <a:xfrm>
-            <a:off x="685800" y="2304288"/>
+            <a:off x="685800" y="3108960"/>
             <a:ext cx="7772400" cy="676656"/>
           </a:xfrm>
           <a:prstGeom prst="rect">
@@ -7973,13 +8080,13 @@
       </p:sp>
       <p:sp>
         <p:nvSpPr>
-          <p:cNvPr id="13" name="Oval 12"/>
+          <p:cNvPr id="18" name="Oval 17"/>
           <p:cNvSpPr/>
           <p:nvPr/>
         </p:nvSpPr>
         <p:spPr>
           <a:xfrm>
-            <a:off x="868680" y="2441448"/>
+            <a:off x="868680" y="3246120"/>
             <a:ext cx="402336" cy="402336"/>
           </a:xfrm>
           <a:prstGeom prst="ellipse">
@@ -8017,223 +8124,6 @@
       </p:sp>
       <p:sp>
         <p:nvSpPr>
-          <p:cNvPr id="14" name="TextBox 13"/>
-          <p:cNvSpPr txBox="1"/>
-          <p:nvPr/>
-        </p:nvSpPr>
-        <p:spPr>
-          <a:xfrm>
-            <a:off x="868680" y="2537460"/>
-            <a:ext cx="402336" cy="219456"/>
-          </a:xfrm>
-          <a:prstGeom prst="rect">
-            <a:avLst/>
-          </a:prstGeom>
-          <a:noFill/>
-          <a:effectLst/>
-        </p:spPr>
-        <p:txBody>
-          <a:bodyPr wrap="square" anchor="t" lIns="0" rIns="0" tIns="0" bIns="0">
-            <a:spAutoFit/>
-          </a:bodyPr>
-          <a:lstStyle/>
-          <a:p>
-            <a:pPr algn="ctr">
-              <a:lnSpc>
-                <a:spcPct val="125000"/>
-              </a:lnSpc>
-              <a:spcAft>
-                <a:spcPts val="0"/>
-              </a:spcAft>
-            </a:pPr>
-            <a:r>
-              <a:rPr sz="1150" b="1" i="0">
-                <a:solidFill>
-                  <a:srgbClr val="FFFDF7"/>
-                </a:solidFill>
-                <a:latin typeface="Karla"/>
-              </a:rPr>
-              <a:t>2</a:t>
-            </a:r>
-          </a:p>
-        </p:txBody>
-      </p:sp>
-      <p:sp>
-        <p:nvSpPr>
-          <p:cNvPr id="15" name="TextBox 14"/>
-          <p:cNvSpPr txBox="1"/>
-          <p:nvPr/>
-        </p:nvSpPr>
-        <p:spPr>
-          <a:xfrm>
-            <a:off x="1417320" y="2404872"/>
-            <a:ext cx="6821424" cy="237744"/>
-          </a:xfrm>
-          <a:prstGeom prst="rect">
-            <a:avLst/>
-          </a:prstGeom>
-          <a:noFill/>
-          <a:effectLst/>
-        </p:spPr>
-        <p:txBody>
-          <a:bodyPr wrap="square" anchor="t" lIns="0" rIns="0" tIns="0" bIns="0">
-            <a:spAutoFit/>
-          </a:bodyPr>
-          <a:lstStyle/>
-          <a:p>
-            <a:pPr algn="l">
-              <a:lnSpc>
-                <a:spcPct val="125000"/>
-              </a:lnSpc>
-              <a:spcAft>
-                <a:spcPts val="0"/>
-              </a:spcAft>
-            </a:pPr>
-            <a:r>
-              <a:rPr sz="1300" b="1" i="0">
-                <a:solidFill>
-                  <a:srgbClr val="34322F"/>
-                </a:solidFill>
-                <a:latin typeface="Libre Caslon Display"/>
-              </a:rPr>
-              <a:t>One line under it that sums up the story</a:t>
-            </a:r>
-          </a:p>
-        </p:txBody>
-      </p:sp>
-      <p:sp>
-        <p:nvSpPr>
-          <p:cNvPr id="16" name="TextBox 15"/>
-          <p:cNvSpPr txBox="1"/>
-          <p:nvPr/>
-        </p:nvSpPr>
-        <p:spPr>
-          <a:xfrm>
-            <a:off x="1417320" y="2651760"/>
-            <a:ext cx="6821424" cy="256031"/>
-          </a:xfrm>
-          <a:prstGeom prst="rect">
-            <a:avLst/>
-          </a:prstGeom>
-          <a:noFill/>
-          <a:effectLst/>
-        </p:spPr>
-        <p:txBody>
-          <a:bodyPr wrap="square" anchor="t" lIns="0" rIns="0" tIns="0" bIns="0">
-            <a:spAutoFit/>
-          </a:bodyPr>
-          <a:lstStyle/>
-          <a:p>
-            <a:pPr algn="l">
-              <a:lnSpc>
-                <a:spcPct val="125000"/>
-              </a:lnSpc>
-              <a:spcAft>
-                <a:spcPts val="0"/>
-              </a:spcAft>
-            </a:pPr>
-            <a:r>
-              <a:rPr sz="1100" b="0" i="0">
-                <a:solidFill>
-                  <a:srgbClr val="56524B"/>
-                </a:solidFill>
-                <a:latin typeface="Karla"/>
-              </a:rPr>
-              <a:t>Who made the claim, and what they stood to gain.</a:t>
-            </a:r>
-          </a:p>
-        </p:txBody>
-      </p:sp>
-      <p:sp>
-        <p:nvSpPr>
-          <p:cNvPr id="17" name="Rectangle 16"/>
-          <p:cNvSpPr/>
-          <p:nvPr/>
-        </p:nvSpPr>
-        <p:spPr>
-          <a:xfrm>
-            <a:off x="685800" y="3108960"/>
-            <a:ext cx="7772400" cy="676656"/>
-          </a:xfrm>
-          <a:prstGeom prst="rect">
-            <a:avLst/>
-          </a:prstGeom>
-          <a:solidFill>
-            <a:srgbClr val="FFFDF7"/>
-          </a:solidFill>
-          <a:ln>
-            <a:noFill/>
-          </a:ln>
-          <a:effectLst/>
-        </p:spPr>
-        <p:style>
-          <a:lnRef idx="1">
-            <a:schemeClr val="accent1"/>
-          </a:lnRef>
-          <a:fillRef idx="3">
-            <a:schemeClr val="accent1"/>
-          </a:fillRef>
-          <a:effectRef idx="0">
-            <a:schemeClr val="accent1"/>
-          </a:effectRef>
-          <a:fontRef idx="minor">
-            <a:schemeClr val="lt1"/>
-          </a:fontRef>
-        </p:style>
-        <p:txBody>
-          <a:bodyPr rtlCol="0" anchor="ctr"/>
-          <a:lstStyle/>
-          <a:p>
-            <a:pPr algn="ctr"/>
-          </a:p>
-        </p:txBody>
-      </p:sp>
-      <p:sp>
-        <p:nvSpPr>
-          <p:cNvPr id="18" name="Oval 17"/>
-          <p:cNvSpPr/>
-          <p:nvPr/>
-        </p:nvSpPr>
-        <p:spPr>
-          <a:xfrm>
-            <a:off x="868680" y="3246120"/>
-            <a:ext cx="402336" cy="402336"/>
-          </a:xfrm>
-          <a:prstGeom prst="ellipse">
-            <a:avLst/>
-          </a:prstGeom>
-          <a:solidFill>
-            <a:srgbClr val="34322F"/>
-          </a:solidFill>
-          <a:ln>
-            <a:noFill/>
-          </a:ln>
-          <a:effectLst/>
-        </p:spPr>
-        <p:style>
-          <a:lnRef idx="1">
-            <a:schemeClr val="accent1"/>
-          </a:lnRef>
-          <a:fillRef idx="3">
-            <a:schemeClr val="accent1"/>
-          </a:fillRef>
-          <a:effectRef idx="0">
-            <a:schemeClr val="accent1"/>
-          </a:effectRef>
-          <a:fontRef idx="minor">
-            <a:schemeClr val="lt1"/>
-          </a:fontRef>
-        </p:style>
-        <p:txBody>
-          <a:bodyPr rtlCol="0" anchor="ctr"/>
-          <a:lstStyle/>
-          <a:p>
-            <a:pPr algn="ctr"/>
-          </a:p>
-        </p:txBody>
-      </p:sp>
-      <p:sp>
-        <p:nvSpPr>
           <p:cNvPr id="19" name="TextBox 18"/>
           <p:cNvSpPr txBox="1"/>
           <p:nvPr/>
@@ -8268,7 +8158,7 @@
                 <a:solidFill>
                   <a:srgbClr val="FFFDF7"/>
                 </a:solidFill>
-                <a:latin typeface="Karla"/>
+                <a:latin typeface="Calibri"/>
               </a:rPr>
               <a:t>3</a:t>
             </a:r>
@@ -8307,11 +8197,11 @@
               </a:spcAft>
             </a:pPr>
             <a:r>
-              <a:rPr sz="1300" b="1" i="0">
+              <a:rPr sz="1300" b="0" i="0">
                 <a:solidFill>
                   <a:srgbClr val="34322F"/>
                 </a:solidFill>
-                <a:latin typeface="Libre Caslon Display"/>
+                <a:latin typeface="Georgia"/>
               </a:rPr>
               <a:t>The story, in four or five sentences</a:t>
             </a:r>
@@ -8354,7 +8244,7 @@
                 <a:solidFill>
                   <a:srgbClr val="56524B"/>
                 </a:solidFill>
-                <a:latin typeface="Karla"/>
+                <a:latin typeface="Calibri"/>
               </a:rPr>
               <a:t>Use at least two cards, name each one, and put in one number from your sums.</a:t>
             </a:r>
@@ -8397,7 +8287,7 @@
                 <a:solidFill>
                   <a:srgbClr val="34322F"/>
                 </a:solidFill>
-                <a:latin typeface="Karla"/>
+                <a:latin typeface="Calibri"/>
               </a:rPr>
               <a:t>Your evidence sheet has everything you need. Write it for somebody who has not seen the cards.</a:t>
             </a:r>
@@ -8465,7 +8355,7 @@
                 <a:solidFill>
                   <a:srgbClr val="8C877D"/>
                 </a:solidFill>
-                <a:latin typeface="Karla"/>
+                <a:latin typeface="Calibri"/>
               </a:rPr>
               <a:t>The Pastoral Guide</a:t>
             </a:r>
@@ -8508,7 +8398,7 @@
                 <a:solidFill>
                   <a:srgbClr val="8C877D"/>
                 </a:solidFill>
-                <a:latin typeface="Karla"/>
+                <a:latin typeface="Calibri"/>
               </a:rPr>
               <a:t>14 / 19</a:t>
             </a:r>
@@ -8613,7 +8503,7 @@
                 <a:solidFill>
                   <a:srgbClr val="34322F"/>
                 </a:solidFill>
-                <a:latin typeface="Karla"/>
+                <a:latin typeface="Calibri"/>
               </a:rPr>
               <a:t>QUESTION THE HEADLINE  ·  LESSON 3 OF 5</a:t>
             </a:r>
@@ -8622,19 +8512,147 @@
       </p:sp>
       <p:sp>
         <p:nvSpPr>
-          <p:cNvPr id="4" name="Rounded Rectangle 3"/>
+          <p:cNvPr id="5" name="TextBox 4"/>
+          <p:cNvSpPr txBox="1"/>
+          <p:nvPr/>
+        </p:nvSpPr>
+        <p:spPr>
+          <a:xfrm>
+            <a:off x="685800" y="566928"/>
+            <a:ext cx="7772400" cy="434848"/>
+          </a:xfrm>
+          <a:prstGeom prst="rect">
+            <a:avLst/>
+          </a:prstGeom>
+          <a:noFill/>
+          <a:effectLst/>
+        </p:spPr>
+        <p:txBody>
+          <a:bodyPr wrap="square" anchor="t" lIns="0" rIns="0" tIns="0" bIns="0">
+            <a:spAutoFit/>
+          </a:bodyPr>
+          <a:lstStyle/>
+          <a:p>
+            <a:pPr algn="l">
+              <a:lnSpc>
+                <a:spcPct val="105000"/>
+              </a:lnSpc>
+              <a:spcAft>
+                <a:spcPts val="0"/>
+              </a:spcAft>
+            </a:pPr>
+            <a:r>
+              <a:rPr sz="2800" b="0" i="0">
+                <a:solidFill>
+                  <a:srgbClr val="262422"/>
+                </a:solidFill>
+                <a:latin typeface="Georgia"/>
+              </a:rPr>
+              <a:t>Check somebody else’s page</a:t>
+            </a:r>
+          </a:p>
+        </p:txBody>
+      </p:sp>
+      <p:sp>
+        <p:nvSpPr>
+          <p:cNvPr id="6" name="TextBox 5"/>
+          <p:cNvSpPr txBox="1"/>
+          <p:nvPr/>
+        </p:nvSpPr>
+        <p:spPr>
+          <a:xfrm>
+            <a:off x="685800" y="1152144"/>
+            <a:ext cx="7772400" cy="274320"/>
+          </a:xfrm>
+          <a:prstGeom prst="rect">
+            <a:avLst/>
+          </a:prstGeom>
+          <a:noFill/>
+          <a:effectLst/>
+        </p:spPr>
+        <p:txBody>
+          <a:bodyPr wrap="square" anchor="t" lIns="0" rIns="0" tIns="0" bIns="0">
+            <a:spAutoFit/>
+          </a:bodyPr>
+          <a:lstStyle/>
+          <a:p>
+            <a:pPr algn="l">
+              <a:lnSpc>
+                <a:spcPct val="125000"/>
+              </a:lnSpc>
+              <a:spcAft>
+                <a:spcPts val="0"/>
+              </a:spcAft>
+            </a:pPr>
+            <a:r>
+              <a:rPr sz="1300" b="0" i="0">
+                <a:solidFill>
+                  <a:srgbClr val="56524B"/>
+                </a:solidFill>
+                <a:latin typeface="Calibri"/>
+              </a:rPr>
+              <a:t>Swap front pages with somebody from another group. Tick each box it passes.</a:t>
+            </a:r>
+          </a:p>
+        </p:txBody>
+      </p:sp>
+      <p:sp>
+        <p:nvSpPr>
+          <p:cNvPr id="7" name="Rectangle 6"/>
           <p:cNvSpPr/>
           <p:nvPr/>
         </p:nvSpPr>
         <p:spPr>
           <a:xfrm>
-            <a:off x="7714534" y="246888"/>
-            <a:ext cx="743665" cy="237744"/>
-          </a:xfrm>
-          <a:prstGeom prst="roundRect">
-            <a:avLst>
-              <a:gd name="adj" fmla="val 50000"/>
-            </a:avLst>
+            <a:off x="685800" y="1591056"/>
+            <a:ext cx="7772400" cy="676656"/>
+          </a:xfrm>
+          <a:prstGeom prst="rect">
+            <a:avLst/>
+          </a:prstGeom>
+          <a:solidFill>
+            <a:srgbClr val="FFFDF7"/>
+          </a:solidFill>
+          <a:ln>
+            <a:noFill/>
+          </a:ln>
+          <a:effectLst/>
+        </p:spPr>
+        <p:style>
+          <a:lnRef idx="1">
+            <a:schemeClr val="accent1"/>
+          </a:lnRef>
+          <a:fillRef idx="3">
+            <a:schemeClr val="accent1"/>
+          </a:fillRef>
+          <a:effectRef idx="0">
+            <a:schemeClr val="accent1"/>
+          </a:effectRef>
+          <a:fontRef idx="minor">
+            <a:schemeClr val="lt1"/>
+          </a:fontRef>
+        </p:style>
+        <p:txBody>
+          <a:bodyPr rtlCol="0" anchor="ctr"/>
+          <a:lstStyle/>
+          <a:p>
+            <a:pPr algn="ctr"/>
+          </a:p>
+        </p:txBody>
+      </p:sp>
+      <p:sp>
+        <p:nvSpPr>
+          <p:cNvPr id="8" name="Oval 7"/>
+          <p:cNvSpPr/>
+          <p:nvPr/>
+        </p:nvSpPr>
+        <p:spPr>
+          <a:xfrm>
+            <a:off x="868680" y="1728216"/>
+            <a:ext cx="402336" cy="402336"/>
+          </a:xfrm>
+          <a:prstGeom prst="ellipse">
+            <a:avLst/>
           </a:prstGeom>
           <a:solidFill>
             <a:srgbClr val="34322F"/>
@@ -8659,32 +8677,66 @@
           </a:fontRef>
         </p:style>
         <p:txBody>
-          <a:bodyPr rtlCol="0" anchor="ctr" wrap="none" lIns="0" rIns="0" tIns="0" bIns="0"/>
+          <a:bodyPr rtlCol="0" anchor="ctr"/>
           <a:lstStyle/>
           <a:p>
             <a:pPr algn="ctr"/>
-            <a:r>
-              <a:rPr sz="950" b="1" spc="90">
+          </a:p>
+        </p:txBody>
+      </p:sp>
+      <p:sp>
+        <p:nvSpPr>
+          <p:cNvPr id="9" name="TextBox 8"/>
+          <p:cNvSpPr txBox="1"/>
+          <p:nvPr/>
+        </p:nvSpPr>
+        <p:spPr>
+          <a:xfrm>
+            <a:off x="868680" y="1824228"/>
+            <a:ext cx="402336" cy="219456"/>
+          </a:xfrm>
+          <a:prstGeom prst="rect">
+            <a:avLst/>
+          </a:prstGeom>
+          <a:noFill/>
+          <a:effectLst/>
+        </p:spPr>
+        <p:txBody>
+          <a:bodyPr wrap="square" anchor="t" lIns="0" rIns="0" tIns="0" bIns="0">
+            <a:spAutoFit/>
+          </a:bodyPr>
+          <a:lstStyle/>
+          <a:p>
+            <a:pPr algn="ctr">
+              <a:lnSpc>
+                <a:spcPct val="125000"/>
+              </a:lnSpc>
+              <a:spcAft>
+                <a:spcPts val="0"/>
+              </a:spcAft>
+            </a:pPr>
+            <a:r>
+              <a:rPr sz="1150" b="1" i="0">
                 <a:solidFill>
                   <a:srgbClr val="FFFDF7"/>
                 </a:solidFill>
-                <a:latin typeface="Karla"/>
-              </a:rPr>
-              <a:t>MARK</a:t>
-            </a:r>
-          </a:p>
-        </p:txBody>
-      </p:sp>
-      <p:sp>
-        <p:nvSpPr>
-          <p:cNvPr id="5" name="TextBox 4"/>
-          <p:cNvSpPr txBox="1"/>
-          <p:nvPr/>
-        </p:nvSpPr>
-        <p:spPr>
-          <a:xfrm>
-            <a:off x="685800" y="566928"/>
-            <a:ext cx="7772400" cy="434848"/>
+                <a:latin typeface="Calibri"/>
+              </a:rPr>
+              <a:t>1</a:t>
+            </a:r>
+          </a:p>
+        </p:txBody>
+      </p:sp>
+      <p:sp>
+        <p:nvSpPr>
+          <p:cNvPr id="10" name="TextBox 9"/>
+          <p:cNvSpPr txBox="1"/>
+          <p:nvPr/>
+        </p:nvSpPr>
+        <p:spPr>
+          <a:xfrm>
+            <a:off x="1417320" y="1691640"/>
+            <a:ext cx="6821424" cy="237744"/>
           </a:xfrm>
           <a:prstGeom prst="rect">
             <a:avLst/>
@@ -8700,34 +8752,34 @@
           <a:p>
             <a:pPr algn="l">
               <a:lnSpc>
-                <a:spcPct val="105000"/>
-              </a:lnSpc>
-              <a:spcAft>
-                <a:spcPts val="0"/>
-              </a:spcAft>
-            </a:pPr>
-            <a:r>
-              <a:rPr sz="2800" b="1" i="0">
-                <a:solidFill>
-                  <a:srgbClr val="262422"/>
-                </a:solidFill>
-                <a:latin typeface="Libre Caslon Display"/>
-              </a:rPr>
-              <a:t>Check somebody else’s page</a:t>
-            </a:r>
-          </a:p>
-        </p:txBody>
-      </p:sp>
-      <p:sp>
-        <p:nvSpPr>
-          <p:cNvPr id="6" name="TextBox 5"/>
-          <p:cNvSpPr txBox="1"/>
-          <p:nvPr/>
-        </p:nvSpPr>
-        <p:spPr>
-          <a:xfrm>
-            <a:off x="685800" y="1152144"/>
-            <a:ext cx="7772400" cy="274320"/>
+                <a:spcPct val="125000"/>
+              </a:lnSpc>
+              <a:spcAft>
+                <a:spcPts val="0"/>
+              </a:spcAft>
+            </a:pPr>
+            <a:r>
+              <a:rPr sz="1300" b="0" i="0">
+                <a:solidFill>
+                  <a:srgbClr val="34322F"/>
+                </a:solidFill>
+                <a:latin typeface="Georgia"/>
+              </a:rPr>
+              <a:t>Is the headline true to the evidence?</a:t>
+            </a:r>
+          </a:p>
+        </p:txBody>
+      </p:sp>
+      <p:sp>
+        <p:nvSpPr>
+          <p:cNvPr id="11" name="TextBox 10"/>
+          <p:cNvSpPr txBox="1"/>
+          <p:nvPr/>
+        </p:nvSpPr>
+        <p:spPr>
+          <a:xfrm>
+            <a:off x="1417320" y="1938528"/>
+            <a:ext cx="6821424" cy="256031"/>
           </a:xfrm>
           <a:prstGeom prst="rect">
             <a:avLst/>
@@ -8750,26 +8802,26 @@
               </a:spcAft>
             </a:pPr>
             <a:r>
-              <a:rPr sz="1300" b="0" i="0">
+              <a:rPr sz="1100" b="0" i="0">
                 <a:solidFill>
                   <a:srgbClr val="56524B"/>
                 </a:solidFill>
-                <a:latin typeface="Karla"/>
-              </a:rPr>
-              <a:t>Swap front pages with somebody from another group. Tick each box it passes.</a:t>
-            </a:r>
-          </a:p>
-        </p:txBody>
-      </p:sp>
-      <p:sp>
-        <p:nvSpPr>
-          <p:cNvPr id="7" name="Rectangle 6"/>
+                <a:latin typeface="Calibri"/>
+              </a:rPr>
+              <a:t>Not bigger, not smaller, than what the cards show.</a:t>
+            </a:r>
+          </a:p>
+        </p:txBody>
+      </p:sp>
+      <p:sp>
+        <p:nvSpPr>
+          <p:cNvPr id="12" name="Rectangle 11"/>
           <p:cNvSpPr/>
           <p:nvPr/>
         </p:nvSpPr>
         <p:spPr>
           <a:xfrm>
-            <a:off x="685800" y="1591056"/>
+            <a:off x="685800" y="2414016"/>
             <a:ext cx="7772400" cy="676656"/>
           </a:xfrm>
           <a:prstGeom prst="rect">
@@ -8807,13 +8859,13 @@
       </p:sp>
       <p:sp>
         <p:nvSpPr>
-          <p:cNvPr id="8" name="Oval 7"/>
+          <p:cNvPr id="13" name="Oval 12"/>
           <p:cNvSpPr/>
           <p:nvPr/>
         </p:nvSpPr>
         <p:spPr>
           <a:xfrm>
-            <a:off x="868680" y="1728216"/>
+            <a:off x="868680" y="2551176"/>
             <a:ext cx="402336" cy="402336"/>
           </a:xfrm>
           <a:prstGeom prst="ellipse">
@@ -8851,13 +8903,13 @@
       </p:sp>
       <p:sp>
         <p:nvSpPr>
-          <p:cNvPr id="9" name="TextBox 8"/>
-          <p:cNvSpPr txBox="1"/>
-          <p:nvPr/>
-        </p:nvSpPr>
-        <p:spPr>
-          <a:xfrm>
-            <a:off x="868680" y="1824228"/>
+          <p:cNvPr id="14" name="TextBox 13"/>
+          <p:cNvSpPr txBox="1"/>
+          <p:nvPr/>
+        </p:nvSpPr>
+        <p:spPr>
+          <a:xfrm>
+            <a:off x="868680" y="2647188"/>
             <a:ext cx="402336" cy="219456"/>
           </a:xfrm>
           <a:prstGeom prst="rect">
@@ -8885,22 +8937,22 @@
                 <a:solidFill>
                   <a:srgbClr val="FFFDF7"/>
                 </a:solidFill>
-                <a:latin typeface="Karla"/>
-              </a:rPr>
-              <a:t>1</a:t>
-            </a:r>
-          </a:p>
-        </p:txBody>
-      </p:sp>
-      <p:sp>
-        <p:nvSpPr>
-          <p:cNvPr id="10" name="TextBox 9"/>
-          <p:cNvSpPr txBox="1"/>
-          <p:nvPr/>
-        </p:nvSpPr>
-        <p:spPr>
-          <a:xfrm>
-            <a:off x="1417320" y="1691640"/>
+                <a:latin typeface="Calibri"/>
+              </a:rPr>
+              <a:t>2</a:t>
+            </a:r>
+          </a:p>
+        </p:txBody>
+      </p:sp>
+      <p:sp>
+        <p:nvSpPr>
+          <p:cNvPr id="15" name="TextBox 14"/>
+          <p:cNvSpPr txBox="1"/>
+          <p:nvPr/>
+        </p:nvSpPr>
+        <p:spPr>
+          <a:xfrm>
+            <a:off x="1417320" y="2514600"/>
             <a:ext cx="6821424" cy="237744"/>
           </a:xfrm>
           <a:prstGeom prst="rect">
@@ -8924,26 +8976,26 @@
               </a:spcAft>
             </a:pPr>
             <a:r>
-              <a:rPr sz="1300" b="1" i="0">
+              <a:rPr sz="1300" b="0" i="0">
                 <a:solidFill>
                   <a:srgbClr val="34322F"/>
                 </a:solidFill>
-                <a:latin typeface="Libre Caslon Display"/>
-              </a:rPr>
-              <a:t>Is the headline true to the evidence?</a:t>
-            </a:r>
-          </a:p>
-        </p:txBody>
-      </p:sp>
-      <p:sp>
-        <p:nvSpPr>
-          <p:cNvPr id="11" name="TextBox 10"/>
-          <p:cNvSpPr txBox="1"/>
-          <p:nvPr/>
-        </p:nvSpPr>
-        <p:spPr>
-          <a:xfrm>
-            <a:off x="1417320" y="1938528"/>
+                <a:latin typeface="Georgia"/>
+              </a:rPr>
+              <a:t>Does it say where the evidence came from?</a:t>
+            </a:r>
+          </a:p>
+        </p:txBody>
+      </p:sp>
+      <p:sp>
+        <p:nvSpPr>
+          <p:cNvPr id="16" name="TextBox 15"/>
+          <p:cNvSpPr txBox="1"/>
+          <p:nvPr/>
+        </p:nvSpPr>
+        <p:spPr>
+          <a:xfrm>
+            <a:off x="1417320" y="2761488"/>
             <a:ext cx="6821424" cy="256031"/>
           </a:xfrm>
           <a:prstGeom prst="rect">
@@ -8971,22 +9023,22 @@
                 <a:solidFill>
                   <a:srgbClr val="56524B"/>
                 </a:solidFill>
-                <a:latin typeface="Karla"/>
-              </a:rPr>
-              <a:t>Not bigger, not smaller, than what the cards show.</a:t>
-            </a:r>
-          </a:p>
-        </p:txBody>
-      </p:sp>
-      <p:sp>
-        <p:nvSpPr>
-          <p:cNvPr id="12" name="Rectangle 11"/>
+                <a:latin typeface="Calibri"/>
+              </a:rPr>
+              <a:t>A study, a document, a person with a name.</a:t>
+            </a:r>
+          </a:p>
+        </p:txBody>
+      </p:sp>
+      <p:sp>
+        <p:nvSpPr>
+          <p:cNvPr id="17" name="Rectangle 16"/>
           <p:cNvSpPr/>
           <p:nvPr/>
         </p:nvSpPr>
         <p:spPr>
           <a:xfrm>
-            <a:off x="685800" y="2414016"/>
+            <a:off x="685800" y="3236976"/>
             <a:ext cx="7772400" cy="676656"/>
           </a:xfrm>
           <a:prstGeom prst="rect">
@@ -9024,13 +9076,13 @@
       </p:sp>
       <p:sp>
         <p:nvSpPr>
-          <p:cNvPr id="13" name="Oval 12"/>
+          <p:cNvPr id="18" name="Oval 17"/>
           <p:cNvSpPr/>
           <p:nvPr/>
         </p:nvSpPr>
         <p:spPr>
           <a:xfrm>
-            <a:off x="868680" y="2551176"/>
+            <a:off x="868680" y="3374136"/>
             <a:ext cx="402336" cy="402336"/>
           </a:xfrm>
           <a:prstGeom prst="ellipse">
@@ -9068,223 +9120,6 @@
       </p:sp>
       <p:sp>
         <p:nvSpPr>
-          <p:cNvPr id="14" name="TextBox 13"/>
-          <p:cNvSpPr txBox="1"/>
-          <p:nvPr/>
-        </p:nvSpPr>
-        <p:spPr>
-          <a:xfrm>
-            <a:off x="868680" y="2647188"/>
-            <a:ext cx="402336" cy="219456"/>
-          </a:xfrm>
-          <a:prstGeom prst="rect">
-            <a:avLst/>
-          </a:prstGeom>
-          <a:noFill/>
-          <a:effectLst/>
-        </p:spPr>
-        <p:txBody>
-          <a:bodyPr wrap="square" anchor="t" lIns="0" rIns="0" tIns="0" bIns="0">
-            <a:spAutoFit/>
-          </a:bodyPr>
-          <a:lstStyle/>
-          <a:p>
-            <a:pPr algn="ctr">
-              <a:lnSpc>
-                <a:spcPct val="125000"/>
-              </a:lnSpc>
-              <a:spcAft>
-                <a:spcPts val="0"/>
-              </a:spcAft>
-            </a:pPr>
-            <a:r>
-              <a:rPr sz="1150" b="1" i="0">
-                <a:solidFill>
-                  <a:srgbClr val="FFFDF7"/>
-                </a:solidFill>
-                <a:latin typeface="Karla"/>
-              </a:rPr>
-              <a:t>2</a:t>
-            </a:r>
-          </a:p>
-        </p:txBody>
-      </p:sp>
-      <p:sp>
-        <p:nvSpPr>
-          <p:cNvPr id="15" name="TextBox 14"/>
-          <p:cNvSpPr txBox="1"/>
-          <p:nvPr/>
-        </p:nvSpPr>
-        <p:spPr>
-          <a:xfrm>
-            <a:off x="1417320" y="2514600"/>
-            <a:ext cx="6821424" cy="237744"/>
-          </a:xfrm>
-          <a:prstGeom prst="rect">
-            <a:avLst/>
-          </a:prstGeom>
-          <a:noFill/>
-          <a:effectLst/>
-        </p:spPr>
-        <p:txBody>
-          <a:bodyPr wrap="square" anchor="t" lIns="0" rIns="0" tIns="0" bIns="0">
-            <a:spAutoFit/>
-          </a:bodyPr>
-          <a:lstStyle/>
-          <a:p>
-            <a:pPr algn="l">
-              <a:lnSpc>
-                <a:spcPct val="125000"/>
-              </a:lnSpc>
-              <a:spcAft>
-                <a:spcPts val="0"/>
-              </a:spcAft>
-            </a:pPr>
-            <a:r>
-              <a:rPr sz="1300" b="1" i="0">
-                <a:solidFill>
-                  <a:srgbClr val="34322F"/>
-                </a:solidFill>
-                <a:latin typeface="Libre Caslon Display"/>
-              </a:rPr>
-              <a:t>Does it say where the evidence came from?</a:t>
-            </a:r>
-          </a:p>
-        </p:txBody>
-      </p:sp>
-      <p:sp>
-        <p:nvSpPr>
-          <p:cNvPr id="16" name="TextBox 15"/>
-          <p:cNvSpPr txBox="1"/>
-          <p:nvPr/>
-        </p:nvSpPr>
-        <p:spPr>
-          <a:xfrm>
-            <a:off x="1417320" y="2761488"/>
-            <a:ext cx="6821424" cy="256031"/>
-          </a:xfrm>
-          <a:prstGeom prst="rect">
-            <a:avLst/>
-          </a:prstGeom>
-          <a:noFill/>
-          <a:effectLst/>
-        </p:spPr>
-        <p:txBody>
-          <a:bodyPr wrap="square" anchor="t" lIns="0" rIns="0" tIns="0" bIns="0">
-            <a:spAutoFit/>
-          </a:bodyPr>
-          <a:lstStyle/>
-          <a:p>
-            <a:pPr algn="l">
-              <a:lnSpc>
-                <a:spcPct val="125000"/>
-              </a:lnSpc>
-              <a:spcAft>
-                <a:spcPts val="0"/>
-              </a:spcAft>
-            </a:pPr>
-            <a:r>
-              <a:rPr sz="1100" b="0" i="0">
-                <a:solidFill>
-                  <a:srgbClr val="56524B"/>
-                </a:solidFill>
-                <a:latin typeface="Karla"/>
-              </a:rPr>
-              <a:t>A study, a document, a person with a name.</a:t>
-            </a:r>
-          </a:p>
-        </p:txBody>
-      </p:sp>
-      <p:sp>
-        <p:nvSpPr>
-          <p:cNvPr id="17" name="Rectangle 16"/>
-          <p:cNvSpPr/>
-          <p:nvPr/>
-        </p:nvSpPr>
-        <p:spPr>
-          <a:xfrm>
-            <a:off x="685800" y="3236976"/>
-            <a:ext cx="7772400" cy="676656"/>
-          </a:xfrm>
-          <a:prstGeom prst="rect">
-            <a:avLst/>
-          </a:prstGeom>
-          <a:solidFill>
-            <a:srgbClr val="FFFDF7"/>
-          </a:solidFill>
-          <a:ln>
-            <a:noFill/>
-          </a:ln>
-          <a:effectLst/>
-        </p:spPr>
-        <p:style>
-          <a:lnRef idx="1">
-            <a:schemeClr val="accent1"/>
-          </a:lnRef>
-          <a:fillRef idx="3">
-            <a:schemeClr val="accent1"/>
-          </a:fillRef>
-          <a:effectRef idx="0">
-            <a:schemeClr val="accent1"/>
-          </a:effectRef>
-          <a:fontRef idx="minor">
-            <a:schemeClr val="lt1"/>
-          </a:fontRef>
-        </p:style>
-        <p:txBody>
-          <a:bodyPr rtlCol="0" anchor="ctr"/>
-          <a:lstStyle/>
-          <a:p>
-            <a:pPr algn="ctr"/>
-          </a:p>
-        </p:txBody>
-      </p:sp>
-      <p:sp>
-        <p:nvSpPr>
-          <p:cNvPr id="18" name="Oval 17"/>
-          <p:cNvSpPr/>
-          <p:nvPr/>
-        </p:nvSpPr>
-        <p:spPr>
-          <a:xfrm>
-            <a:off x="868680" y="3374136"/>
-            <a:ext cx="402336" cy="402336"/>
-          </a:xfrm>
-          <a:prstGeom prst="ellipse">
-            <a:avLst/>
-          </a:prstGeom>
-          <a:solidFill>
-            <a:srgbClr val="34322F"/>
-          </a:solidFill>
-          <a:ln>
-            <a:noFill/>
-          </a:ln>
-          <a:effectLst/>
-        </p:spPr>
-        <p:style>
-          <a:lnRef idx="1">
-            <a:schemeClr val="accent1"/>
-          </a:lnRef>
-          <a:fillRef idx="3">
-            <a:schemeClr val="accent1"/>
-          </a:fillRef>
-          <a:effectRef idx="0">
-            <a:schemeClr val="accent1"/>
-          </a:effectRef>
-          <a:fontRef idx="minor">
-            <a:schemeClr val="lt1"/>
-          </a:fontRef>
-        </p:style>
-        <p:txBody>
-          <a:bodyPr rtlCol="0" anchor="ctr"/>
-          <a:lstStyle/>
-          <a:p>
-            <a:pPr algn="ctr"/>
-          </a:p>
-        </p:txBody>
-      </p:sp>
-      <p:sp>
-        <p:nvSpPr>
           <p:cNvPr id="19" name="TextBox 18"/>
           <p:cNvSpPr txBox="1"/>
           <p:nvPr/>
@@ -9319,7 +9154,7 @@
                 <a:solidFill>
                   <a:srgbClr val="FFFDF7"/>
                 </a:solidFill>
-                <a:latin typeface="Karla"/>
+                <a:latin typeface="Calibri"/>
               </a:rPr>
               <a:t>3</a:t>
             </a:r>
@@ -9358,11 +9193,11 @@
               </a:spcAft>
             </a:pPr>
             <a:r>
-              <a:rPr sz="1300" b="1" i="0">
+              <a:rPr sz="1300" b="0" i="0">
                 <a:solidFill>
                   <a:srgbClr val="34322F"/>
                 </a:solidFill>
-                <a:latin typeface="Libre Caslon Display"/>
+                <a:latin typeface="Georgia"/>
               </a:rPr>
               <a:t>Would it survive the five questions?</a:t>
             </a:r>
@@ -9405,7 +9240,7 @@
                 <a:solidFill>
                   <a:srgbClr val="56524B"/>
                 </a:solidFill>
-                <a:latin typeface="Karla"/>
+                <a:latin typeface="Calibri"/>
               </a:rPr>
               <a:t>Try one or two of them on it.</a:t>
             </a:r>
@@ -9448,7 +9283,7 @@
                 <a:solidFill>
                   <a:srgbClr val="34322F"/>
                 </a:solidFill>
-                <a:latin typeface="Karla"/>
+                <a:latin typeface="Calibri"/>
               </a:rPr>
               <a:t>Write one change that would make it better, then hand it back.</a:t>
             </a:r>
@@ -9516,7 +9351,7 @@
                 <a:solidFill>
                   <a:srgbClr val="8C877D"/>
                 </a:solidFill>
-                <a:latin typeface="Karla"/>
+                <a:latin typeface="Calibri"/>
               </a:rPr>
               <a:t>The Pastoral Guide</a:t>
             </a:r>
@@ -9559,7 +9394,7 @@
                 <a:solidFill>
                   <a:srgbClr val="8C877D"/>
                 </a:solidFill>
-                <a:latin typeface="Karla"/>
+                <a:latin typeface="Calibri"/>
               </a:rPr>
               <a:t>15 / 19</a:t>
             </a:r>
@@ -9664,7 +9499,7 @@
                 <a:solidFill>
                   <a:srgbClr val="34322F"/>
                 </a:solidFill>
-                <a:latin typeface="Karla"/>
+                <a:latin typeface="Calibri"/>
               </a:rPr>
               <a:t>QUESTION THE HEADLINE  ·  LESSON 3 OF 5</a:t>
             </a:r>
@@ -9703,11 +9538,11 @@
               </a:spcAft>
             </a:pPr>
             <a:r>
-              <a:rPr sz="2800" b="1" i="0">
+              <a:rPr sz="2800" b="0" i="0">
                 <a:solidFill>
                   <a:srgbClr val="262422"/>
                 </a:solidFill>
-                <a:latin typeface="Libre Caslon Display"/>
+                <a:latin typeface="Georgia"/>
               </a:rPr>
               <a:t>What really happened</a:t>
             </a:r>
@@ -9808,7 +9643,7 @@
                 <a:solidFill>
                   <a:srgbClr val="34322F"/>
                 </a:solidFill>
-                <a:latin typeface="Karla"/>
+                <a:latin typeface="Calibri"/>
               </a:rPr>
               <a:t>BUSTED</a:t>
             </a:r>
@@ -9847,11 +9682,11 @@
               </a:spcAft>
             </a:pPr>
             <a:r>
-              <a:rPr sz="1500" b="1" i="0">
+              <a:rPr sz="1500" b="0" i="0">
                 <a:solidFill>
                   <a:srgbClr val="34322F"/>
                 </a:solidFill>
-                <a:latin typeface="Libre Caslon Display"/>
+                <a:latin typeface="Georgia"/>
               </a:rPr>
               <a:t>1946</a:t>
             </a:r>
@@ -9938,7 +9773,7 @@
                 <a:solidFill>
                   <a:srgbClr val="262422"/>
                 </a:solidFill>
-                <a:latin typeface="Karla"/>
+                <a:latin typeface="Calibri"/>
               </a:rPr>
               <a:t>The “More doctors smoke Camels” adverts begin.</a:t>
             </a:r>
@@ -9977,11 +9812,11 @@
               </a:spcAft>
             </a:pPr>
             <a:r>
-              <a:rPr sz="1500" b="1" i="0">
+              <a:rPr sz="1500" b="0" i="0">
                 <a:solidFill>
                   <a:srgbClr val="34322F"/>
                 </a:solidFill>
-                <a:latin typeface="Libre Caslon Display"/>
+                <a:latin typeface="Georgia"/>
               </a:rPr>
               <a:t>1950</a:t>
             </a:r>
@@ -10068,7 +9903,7 @@
                 <a:solidFill>
                   <a:srgbClr val="262422"/>
                 </a:solidFill>
-                <a:latin typeface="Karla"/>
+                <a:latin typeface="Calibri"/>
               </a:rPr>
               <a:t>Doll and Hill link smoking to lung cancer.</a:t>
             </a:r>
@@ -10107,11 +9942,11 @@
               </a:spcAft>
             </a:pPr>
             <a:r>
-              <a:rPr sz="1500" b="1" i="0">
+              <a:rPr sz="1500" b="0" i="0">
                 <a:solidFill>
                   <a:srgbClr val="34322F"/>
                 </a:solidFill>
-                <a:latin typeface="Libre Caslon Display"/>
+                <a:latin typeface="Georgia"/>
               </a:rPr>
               <a:t>1951</a:t>
             </a:r>
@@ -10198,7 +10033,7 @@
                 <a:solidFill>
                   <a:srgbClr val="262422"/>
                 </a:solidFill>
-                <a:latin typeface="Karla"/>
+                <a:latin typeface="Calibri"/>
               </a:rPr>
               <a:t>They start following about 40,000 British doctors.</a:t>
             </a:r>
@@ -10237,11 +10072,11 @@
               </a:spcAft>
             </a:pPr>
             <a:r>
-              <a:rPr sz="1500" b="1" i="0">
+              <a:rPr sz="1500" b="0" i="0">
                 <a:solidFill>
                   <a:srgbClr val="34322F"/>
                 </a:solidFill>
-                <a:latin typeface="Libre Caslon Display"/>
+                <a:latin typeface="Georgia"/>
               </a:rPr>
               <a:t>1964</a:t>
             </a:r>
@@ -10328,7 +10163,7 @@
                 <a:solidFill>
                   <a:srgbClr val="262422"/>
                 </a:solidFill>
-                <a:latin typeface="Karla"/>
+                <a:latin typeface="Calibri"/>
               </a:rPr>
               <a:t>Their study of doctors shows the more you smoke, the higher the risk.</a:t>
             </a:r>
@@ -10415,7 +10250,7 @@
                 <a:solidFill>
                   <a:srgbClr val="D7D2C8"/>
                 </a:solidFill>
-                <a:latin typeface="Karla"/>
+                <a:latin typeface="Calibri"/>
               </a:rPr>
               <a:t>THE QUESTION THAT WOULD HAVE CAUGHT IT</a:t>
             </a:r>
@@ -10454,11 +10289,11 @@
               </a:spcAft>
             </a:pPr>
             <a:r>
-              <a:rPr sz="1800" b="1" i="0">
+              <a:rPr sz="1800" b="0" i="0">
                 <a:solidFill>
                   <a:srgbClr val="FFFDF7"/>
                 </a:solidFill>
-                <a:latin typeface="Libre Caslon Display"/>
+                <a:latin typeface="Georgia"/>
               </a:rPr>
               <a:t>What is the evidence?</a:t>
             </a:r>
@@ -10526,7 +10361,7 @@
                 <a:solidFill>
                   <a:srgbClr val="8C877D"/>
                 </a:solidFill>
-                <a:latin typeface="Karla"/>
+                <a:latin typeface="Calibri"/>
               </a:rPr>
               <a:t>The Pastoral Guide</a:t>
             </a:r>
@@ -10569,7 +10404,7 @@
                 <a:solidFill>
                   <a:srgbClr val="8C877D"/>
                 </a:solidFill>
-                <a:latin typeface="Karla"/>
+                <a:latin typeface="Calibri"/>
               </a:rPr>
               <a:t>16 / 19</a:t>
             </a:r>
@@ -10674,64 +10509,9 @@
                 <a:solidFill>
                   <a:srgbClr val="34322F"/>
                 </a:solidFill>
-                <a:latin typeface="Karla"/>
+                <a:latin typeface="Calibri"/>
               </a:rPr>
               <a:t>QUESTION THE HEADLINE  ·  LESSON 3 OF 5</a:t>
-            </a:r>
-          </a:p>
-        </p:txBody>
-      </p:sp>
-      <p:sp>
-        <p:nvSpPr>
-          <p:cNvPr id="4" name="Rounded Rectangle 3"/>
-          <p:cNvSpPr/>
-          <p:nvPr/>
-        </p:nvSpPr>
-        <p:spPr>
-          <a:xfrm>
-            <a:off x="7640472" y="246888"/>
-            <a:ext cx="817727" cy="237744"/>
-          </a:xfrm>
-          <a:prstGeom prst="roundRect">
-            <a:avLst>
-              <a:gd name="adj" fmla="val 50000"/>
-            </a:avLst>
-          </a:prstGeom>
-          <a:solidFill>
-            <a:srgbClr val="34322F"/>
-          </a:solidFill>
-          <a:ln>
-            <a:noFill/>
-          </a:ln>
-          <a:effectLst/>
-        </p:spPr>
-        <p:style>
-          <a:lnRef idx="1">
-            <a:schemeClr val="accent1"/>
-          </a:lnRef>
-          <a:fillRef idx="3">
-            <a:schemeClr val="accent1"/>
-          </a:fillRef>
-          <a:effectRef idx="0">
-            <a:schemeClr val="accent1"/>
-          </a:effectRef>
-          <a:fontRef idx="minor">
-            <a:schemeClr val="lt1"/>
-          </a:fontRef>
-        </p:style>
-        <p:txBody>
-          <a:bodyPr rtlCol="0" anchor="ctr" wrap="none" lIns="0" rIns="0" tIns="0" bIns="0"/>
-          <a:lstStyle/>
-          <a:p>
-            <a:pPr algn="ctr"/>
-            <a:r>
-              <a:rPr sz="950" b="1" spc="90">
-                <a:solidFill>
-                  <a:srgbClr val="FFFDF7"/>
-                </a:solidFill>
-                <a:latin typeface="Karla"/>
-              </a:rPr>
-              <a:t>ARGUE</a:t>
             </a:r>
           </a:p>
         </p:txBody>
@@ -10772,7 +10552,7 @@
                 <a:solidFill>
                   <a:srgbClr val="56524B"/>
                 </a:solidFill>
-                <a:latin typeface="Karla"/>
+                <a:latin typeface="Calibri"/>
               </a:rPr>
               <a:t>NO RIGHT ANSWER</a:t>
             </a:r>
@@ -10905,11 +10685,11 @@
               </a:spcAft>
             </a:pPr>
             <a:r>
-              <a:rPr sz="2200" b="1" i="0">
+              <a:rPr sz="2200" b="0" i="0">
                 <a:solidFill>
                   <a:srgbClr val="262422"/>
                 </a:solidFill>
-                <a:latin typeface="Libre Caslon Display"/>
+                <a:latin typeface="Georgia"/>
               </a:rPr>
               <a:t>Adverts still use experts, from dentists to scientists in white coats. Would you trust an advert more if it had a doctor in it?</a:t>
             </a:r>
@@ -10952,7 +10732,7 @@
                 <a:solidFill>
                   <a:srgbClr val="34322F"/>
                 </a:solidFill>
-                <a:latin typeface="Karla"/>
+                <a:latin typeface="Calibri"/>
               </a:rPr>
               <a:t>Two minutes with the person next to you, then we hear from a few.</a:t>
             </a:r>
@@ -11020,7 +10800,7 @@
                 <a:solidFill>
                   <a:srgbClr val="8C877D"/>
                 </a:solidFill>
-                <a:latin typeface="Karla"/>
+                <a:latin typeface="Calibri"/>
               </a:rPr>
               <a:t>The Pastoral Guide</a:t>
             </a:r>
@@ -11063,7 +10843,7 @@
                 <a:solidFill>
                   <a:srgbClr val="8C877D"/>
                 </a:solidFill>
-                <a:latin typeface="Karla"/>
+                <a:latin typeface="Calibri"/>
               </a:rPr>
               <a:t>17 / 19</a:t>
             </a:r>
@@ -11168,7 +10948,7 @@
                 <a:solidFill>
                   <a:srgbClr val="34322F"/>
                 </a:solidFill>
-                <a:latin typeface="Karla"/>
+                <a:latin typeface="Calibri"/>
               </a:rPr>
               <a:t>QUESTION THE HEADLINE  ·  LESSON 3 OF 5</a:t>
             </a:r>
@@ -11177,19 +10957,104 @@
       </p:sp>
       <p:sp>
         <p:nvSpPr>
-          <p:cNvPr id="4" name="Rounded Rectangle 3"/>
+          <p:cNvPr id="5" name="TextBox 4"/>
+          <p:cNvSpPr txBox="1"/>
+          <p:nvPr/>
+        </p:nvSpPr>
+        <p:spPr>
+          <a:xfrm>
+            <a:off x="685800" y="566928"/>
+            <a:ext cx="7772400" cy="434848"/>
+          </a:xfrm>
+          <a:prstGeom prst="rect">
+            <a:avLst/>
+          </a:prstGeom>
+          <a:noFill/>
+          <a:effectLst/>
+        </p:spPr>
+        <p:txBody>
+          <a:bodyPr wrap="square" anchor="t" lIns="0" rIns="0" tIns="0" bIns="0">
+            <a:spAutoFit/>
+          </a:bodyPr>
+          <a:lstStyle/>
+          <a:p>
+            <a:pPr algn="l">
+              <a:lnSpc>
+                <a:spcPct val="105000"/>
+              </a:lnSpc>
+              <a:spcAft>
+                <a:spcPts val="0"/>
+              </a:spcAft>
+            </a:pPr>
+            <a:r>
+              <a:rPr sz="2800" b="0" i="0">
+                <a:solidFill>
+                  <a:srgbClr val="262422"/>
+                </a:solidFill>
+                <a:latin typeface="Georgia"/>
+              </a:rPr>
+              <a:t>Two questions, just for you</a:t>
+            </a:r>
+          </a:p>
+        </p:txBody>
+      </p:sp>
+      <p:sp>
+        <p:nvSpPr>
+          <p:cNvPr id="6" name="Rectangle 5"/>
           <p:cNvSpPr/>
           <p:nvPr/>
         </p:nvSpPr>
         <p:spPr>
           <a:xfrm>
-            <a:off x="7486248" y="246888"/>
-            <a:ext cx="971951" cy="237744"/>
-          </a:xfrm>
-          <a:prstGeom prst="roundRect">
-            <a:avLst>
-              <a:gd name="adj" fmla="val 50000"/>
-            </a:avLst>
+            <a:off x="685800" y="1371600"/>
+            <a:ext cx="7772400" cy="946403"/>
+          </a:xfrm>
+          <a:prstGeom prst="rect">
+            <a:avLst/>
+          </a:prstGeom>
+          <a:solidFill>
+            <a:srgbClr val="FFFFFF"/>
+          </a:solidFill>
+          <a:ln>
+            <a:noFill/>
+          </a:ln>
+          <a:effectLst/>
+        </p:spPr>
+        <p:style>
+          <a:lnRef idx="1">
+            <a:schemeClr val="accent1"/>
+          </a:lnRef>
+          <a:fillRef idx="3">
+            <a:schemeClr val="accent1"/>
+          </a:fillRef>
+          <a:effectRef idx="0">
+            <a:schemeClr val="accent1"/>
+          </a:effectRef>
+          <a:fontRef idx="minor">
+            <a:schemeClr val="lt1"/>
+          </a:fontRef>
+        </p:style>
+        <p:txBody>
+          <a:bodyPr rtlCol="0" anchor="ctr"/>
+          <a:lstStyle/>
+          <a:p>
+            <a:pPr algn="ctr"/>
+          </a:p>
+        </p:txBody>
+      </p:sp>
+      <p:sp>
+        <p:nvSpPr>
+          <p:cNvPr id="7" name="Rectangle 6"/>
+          <p:cNvSpPr/>
+          <p:nvPr/>
+        </p:nvSpPr>
+        <p:spPr>
+          <a:xfrm>
+            <a:off x="685800" y="1371600"/>
+            <a:ext cx="45720" cy="946403"/>
+          </a:xfrm>
+          <a:prstGeom prst="rect">
+            <a:avLst/>
           </a:prstGeom>
           <a:solidFill>
             <a:srgbClr val="34322F"/>
@@ -11214,32 +11079,110 @@
           </a:fontRef>
         </p:style>
         <p:txBody>
-          <a:bodyPr rtlCol="0" anchor="ctr" wrap="none" lIns="0" rIns="0" tIns="0" bIns="0"/>
+          <a:bodyPr rtlCol="0" anchor="ctr"/>
           <a:lstStyle/>
           <a:p>
             <a:pPr algn="ctr"/>
-            <a:r>
-              <a:rPr sz="950" b="1" spc="90">
+          </a:p>
+        </p:txBody>
+      </p:sp>
+      <p:sp>
+        <p:nvSpPr>
+          <p:cNvPr id="8" name="Oval 7"/>
+          <p:cNvSpPr/>
+          <p:nvPr/>
+        </p:nvSpPr>
+        <p:spPr>
+          <a:xfrm>
+            <a:off x="896112" y="1643634"/>
+            <a:ext cx="402336" cy="402336"/>
+          </a:xfrm>
+          <a:prstGeom prst="ellipse">
+            <a:avLst/>
+          </a:prstGeom>
+          <a:solidFill>
+            <a:srgbClr val="34322F"/>
+          </a:solidFill>
+          <a:ln>
+            <a:noFill/>
+          </a:ln>
+          <a:effectLst/>
+        </p:spPr>
+        <p:style>
+          <a:lnRef idx="1">
+            <a:schemeClr val="accent1"/>
+          </a:lnRef>
+          <a:fillRef idx="3">
+            <a:schemeClr val="accent1"/>
+          </a:fillRef>
+          <a:effectRef idx="0">
+            <a:schemeClr val="accent1"/>
+          </a:effectRef>
+          <a:fontRef idx="minor">
+            <a:schemeClr val="lt1"/>
+          </a:fontRef>
+        </p:style>
+        <p:txBody>
+          <a:bodyPr rtlCol="0" anchor="ctr"/>
+          <a:lstStyle/>
+          <a:p>
+            <a:pPr algn="ctr"/>
+          </a:p>
+        </p:txBody>
+      </p:sp>
+      <p:sp>
+        <p:nvSpPr>
+          <p:cNvPr id="9" name="TextBox 8"/>
+          <p:cNvSpPr txBox="1"/>
+          <p:nvPr/>
+        </p:nvSpPr>
+        <p:spPr>
+          <a:xfrm>
+            <a:off x="896112" y="1735074"/>
+            <a:ext cx="402336" cy="219456"/>
+          </a:xfrm>
+          <a:prstGeom prst="rect">
+            <a:avLst/>
+          </a:prstGeom>
+          <a:noFill/>
+          <a:effectLst/>
+        </p:spPr>
+        <p:txBody>
+          <a:bodyPr wrap="square" anchor="t" lIns="0" rIns="0" tIns="0" bIns="0">
+            <a:spAutoFit/>
+          </a:bodyPr>
+          <a:lstStyle/>
+          <a:p>
+            <a:pPr algn="ctr">
+              <a:lnSpc>
+                <a:spcPct val="125000"/>
+              </a:lnSpc>
+              <a:spcAft>
+                <a:spcPts val="0"/>
+              </a:spcAft>
+            </a:pPr>
+            <a:r>
+              <a:rPr sz="1200" b="1" i="0">
                 <a:solidFill>
                   <a:srgbClr val="FFFDF7"/>
                 </a:solidFill>
-                <a:latin typeface="Karla"/>
-              </a:rPr>
-              <a:t>FOR YOU</a:t>
-            </a:r>
-          </a:p>
-        </p:txBody>
-      </p:sp>
-      <p:sp>
-        <p:nvSpPr>
-          <p:cNvPr id="5" name="TextBox 4"/>
-          <p:cNvSpPr txBox="1"/>
-          <p:nvPr/>
-        </p:nvSpPr>
-        <p:spPr>
-          <a:xfrm>
-            <a:off x="685800" y="566928"/>
-            <a:ext cx="7772400" cy="434848"/>
+                <a:latin typeface="Calibri"/>
+              </a:rPr>
+              <a:t>1</a:t>
+            </a:r>
+          </a:p>
+        </p:txBody>
+      </p:sp>
+      <p:sp>
+        <p:nvSpPr>
+          <p:cNvPr id="10" name="TextBox 9"/>
+          <p:cNvSpPr txBox="1"/>
+          <p:nvPr/>
+        </p:nvSpPr>
+        <p:spPr>
+          <a:xfrm>
+            <a:off x="1554480" y="1572768"/>
+            <a:ext cx="6675120" cy="544068"/>
           </a:xfrm>
           <a:prstGeom prst="rect">
             <a:avLst/>
@@ -11255,33 +11198,33 @@
           <a:p>
             <a:pPr algn="l">
               <a:lnSpc>
-                <a:spcPct val="105000"/>
-              </a:lnSpc>
-              <a:spcAft>
-                <a:spcPts val="0"/>
-              </a:spcAft>
-            </a:pPr>
-            <a:r>
-              <a:rPr sz="2800" b="1" i="0">
+                <a:spcPct val="115000"/>
+              </a:lnSpc>
+              <a:spcAft>
+                <a:spcPts val="0"/>
+              </a:spcAft>
+            </a:pPr>
+            <a:r>
+              <a:rPr sz="1700" b="0" i="0">
                 <a:solidFill>
                   <a:srgbClr val="262422"/>
                 </a:solidFill>
-                <a:latin typeface="Libre Caslon Display"/>
-              </a:rPr>
-              <a:t>Two questions, just for you</a:t>
-            </a:r>
-          </a:p>
-        </p:txBody>
-      </p:sp>
-      <p:sp>
-        <p:nvSpPr>
-          <p:cNvPr id="6" name="Rectangle 5"/>
+                <a:latin typeface="Georgia"/>
+              </a:rPr>
+              <a:t>Where did you move on the line, and which card moved you?</a:t>
+            </a:r>
+          </a:p>
+        </p:txBody>
+      </p:sp>
+      <p:sp>
+        <p:nvSpPr>
+          <p:cNvPr id="11" name="Rectangle 10"/>
           <p:cNvSpPr/>
           <p:nvPr/>
         </p:nvSpPr>
         <p:spPr>
           <a:xfrm>
-            <a:off x="685800" y="1371600"/>
+            <a:off x="685800" y="2537460"/>
             <a:ext cx="7772400" cy="946403"/>
           </a:xfrm>
           <a:prstGeom prst="rect">
@@ -11319,13 +11262,13 @@
       </p:sp>
       <p:sp>
         <p:nvSpPr>
-          <p:cNvPr id="7" name="Rectangle 6"/>
+          <p:cNvPr id="12" name="Rectangle 11"/>
           <p:cNvSpPr/>
           <p:nvPr/>
         </p:nvSpPr>
         <p:spPr>
           <a:xfrm>
-            <a:off x="685800" y="1371600"/>
+            <a:off x="685800" y="2537460"/>
             <a:ext cx="45720" cy="946403"/>
           </a:xfrm>
           <a:prstGeom prst="rect">
@@ -11363,13 +11306,13 @@
       </p:sp>
       <p:sp>
         <p:nvSpPr>
-          <p:cNvPr id="8" name="Oval 7"/>
+          <p:cNvPr id="13" name="Oval 12"/>
           <p:cNvSpPr/>
           <p:nvPr/>
         </p:nvSpPr>
         <p:spPr>
           <a:xfrm>
-            <a:off x="896112" y="1643634"/>
+            <a:off x="896112" y="2809494"/>
             <a:ext cx="402336" cy="402336"/>
           </a:xfrm>
           <a:prstGeom prst="ellipse">
@@ -11407,224 +11350,6 @@
       </p:sp>
       <p:sp>
         <p:nvSpPr>
-          <p:cNvPr id="9" name="TextBox 8"/>
-          <p:cNvSpPr txBox="1"/>
-          <p:nvPr/>
-        </p:nvSpPr>
-        <p:spPr>
-          <a:xfrm>
-            <a:off x="896112" y="1735074"/>
-            <a:ext cx="402336" cy="219456"/>
-          </a:xfrm>
-          <a:prstGeom prst="rect">
-            <a:avLst/>
-          </a:prstGeom>
-          <a:noFill/>
-          <a:effectLst/>
-        </p:spPr>
-        <p:txBody>
-          <a:bodyPr wrap="square" anchor="t" lIns="0" rIns="0" tIns="0" bIns="0">
-            <a:spAutoFit/>
-          </a:bodyPr>
-          <a:lstStyle/>
-          <a:p>
-            <a:pPr algn="ctr">
-              <a:lnSpc>
-                <a:spcPct val="125000"/>
-              </a:lnSpc>
-              <a:spcAft>
-                <a:spcPts val="0"/>
-              </a:spcAft>
-            </a:pPr>
-            <a:r>
-              <a:rPr sz="1200" b="1" i="0">
-                <a:solidFill>
-                  <a:srgbClr val="FFFDF7"/>
-                </a:solidFill>
-                <a:latin typeface="Karla"/>
-              </a:rPr>
-              <a:t>1</a:t>
-            </a:r>
-          </a:p>
-        </p:txBody>
-      </p:sp>
-      <p:sp>
-        <p:nvSpPr>
-          <p:cNvPr id="10" name="TextBox 9"/>
-          <p:cNvSpPr txBox="1"/>
-          <p:nvPr/>
-        </p:nvSpPr>
-        <p:spPr>
-          <a:xfrm>
-            <a:off x="1554480" y="1572768"/>
-            <a:ext cx="6675120" cy="544068"/>
-          </a:xfrm>
-          <a:prstGeom prst="rect">
-            <a:avLst/>
-          </a:prstGeom>
-          <a:noFill/>
-          <a:effectLst/>
-        </p:spPr>
-        <p:txBody>
-          <a:bodyPr wrap="square" anchor="t" lIns="0" rIns="0" tIns="0" bIns="0">
-            <a:spAutoFit/>
-          </a:bodyPr>
-          <a:lstStyle/>
-          <a:p>
-            <a:pPr algn="l">
-              <a:lnSpc>
-                <a:spcPct val="115000"/>
-              </a:lnSpc>
-              <a:spcAft>
-                <a:spcPts val="0"/>
-              </a:spcAft>
-            </a:pPr>
-            <a:r>
-              <a:rPr sz="1700" b="1" i="0">
-                <a:solidFill>
-                  <a:srgbClr val="262422"/>
-                </a:solidFill>
-                <a:latin typeface="Libre Caslon Display"/>
-              </a:rPr>
-              <a:t>Where did you move on the line, and which card moved you?</a:t>
-            </a:r>
-          </a:p>
-        </p:txBody>
-      </p:sp>
-      <p:sp>
-        <p:nvSpPr>
-          <p:cNvPr id="11" name="Rectangle 10"/>
-          <p:cNvSpPr/>
-          <p:nvPr/>
-        </p:nvSpPr>
-        <p:spPr>
-          <a:xfrm>
-            <a:off x="685800" y="2537460"/>
-            <a:ext cx="7772400" cy="946403"/>
-          </a:xfrm>
-          <a:prstGeom prst="rect">
-            <a:avLst/>
-          </a:prstGeom>
-          <a:solidFill>
-            <a:srgbClr val="FFFFFF"/>
-          </a:solidFill>
-          <a:ln>
-            <a:noFill/>
-          </a:ln>
-          <a:effectLst/>
-        </p:spPr>
-        <p:style>
-          <a:lnRef idx="1">
-            <a:schemeClr val="accent1"/>
-          </a:lnRef>
-          <a:fillRef idx="3">
-            <a:schemeClr val="accent1"/>
-          </a:fillRef>
-          <a:effectRef idx="0">
-            <a:schemeClr val="accent1"/>
-          </a:effectRef>
-          <a:fontRef idx="minor">
-            <a:schemeClr val="lt1"/>
-          </a:fontRef>
-        </p:style>
-        <p:txBody>
-          <a:bodyPr rtlCol="0" anchor="ctr"/>
-          <a:lstStyle/>
-          <a:p>
-            <a:pPr algn="ctr"/>
-          </a:p>
-        </p:txBody>
-      </p:sp>
-      <p:sp>
-        <p:nvSpPr>
-          <p:cNvPr id="12" name="Rectangle 11"/>
-          <p:cNvSpPr/>
-          <p:nvPr/>
-        </p:nvSpPr>
-        <p:spPr>
-          <a:xfrm>
-            <a:off x="685800" y="2537460"/>
-            <a:ext cx="45720" cy="946403"/>
-          </a:xfrm>
-          <a:prstGeom prst="rect">
-            <a:avLst/>
-          </a:prstGeom>
-          <a:solidFill>
-            <a:srgbClr val="34322F"/>
-          </a:solidFill>
-          <a:ln>
-            <a:noFill/>
-          </a:ln>
-          <a:effectLst/>
-        </p:spPr>
-        <p:style>
-          <a:lnRef idx="1">
-            <a:schemeClr val="accent1"/>
-          </a:lnRef>
-          <a:fillRef idx="3">
-            <a:schemeClr val="accent1"/>
-          </a:fillRef>
-          <a:effectRef idx="0">
-            <a:schemeClr val="accent1"/>
-          </a:effectRef>
-          <a:fontRef idx="minor">
-            <a:schemeClr val="lt1"/>
-          </a:fontRef>
-        </p:style>
-        <p:txBody>
-          <a:bodyPr rtlCol="0" anchor="ctr"/>
-          <a:lstStyle/>
-          <a:p>
-            <a:pPr algn="ctr"/>
-          </a:p>
-        </p:txBody>
-      </p:sp>
-      <p:sp>
-        <p:nvSpPr>
-          <p:cNvPr id="13" name="Oval 12"/>
-          <p:cNvSpPr/>
-          <p:nvPr/>
-        </p:nvSpPr>
-        <p:spPr>
-          <a:xfrm>
-            <a:off x="896112" y="2809494"/>
-            <a:ext cx="402336" cy="402336"/>
-          </a:xfrm>
-          <a:prstGeom prst="ellipse">
-            <a:avLst/>
-          </a:prstGeom>
-          <a:solidFill>
-            <a:srgbClr val="34322F"/>
-          </a:solidFill>
-          <a:ln>
-            <a:noFill/>
-          </a:ln>
-          <a:effectLst/>
-        </p:spPr>
-        <p:style>
-          <a:lnRef idx="1">
-            <a:schemeClr val="accent1"/>
-          </a:lnRef>
-          <a:fillRef idx="3">
-            <a:schemeClr val="accent1"/>
-          </a:fillRef>
-          <a:effectRef idx="0">
-            <a:schemeClr val="accent1"/>
-          </a:effectRef>
-          <a:fontRef idx="minor">
-            <a:schemeClr val="lt1"/>
-          </a:fontRef>
-        </p:style>
-        <p:txBody>
-          <a:bodyPr rtlCol="0" anchor="ctr"/>
-          <a:lstStyle/>
-          <a:p>
-            <a:pPr algn="ctr"/>
-          </a:p>
-        </p:txBody>
-      </p:sp>
-      <p:sp>
-        <p:nvSpPr>
           <p:cNvPr id="14" name="TextBox 13"/>
           <p:cNvSpPr txBox="1"/>
           <p:nvPr/>
@@ -11659,7 +11384,7 @@
                 <a:solidFill>
                   <a:srgbClr val="FFFDF7"/>
                 </a:solidFill>
-                <a:latin typeface="Karla"/>
+                <a:latin typeface="Calibri"/>
               </a:rPr>
               <a:t>2</a:t>
             </a:r>
@@ -11698,11 +11423,11 @@
               </a:spcAft>
             </a:pPr>
             <a:r>
-              <a:rPr sz="1700" b="1" i="0">
+              <a:rPr sz="1700" b="0" i="0">
                 <a:solidFill>
                   <a:srgbClr val="262422"/>
                 </a:solidFill>
-                <a:latin typeface="Libre Caslon Display"/>
+                <a:latin typeface="Georgia"/>
               </a:rPr>
               <a:t>Next time you see a headline, which of the five questions will you ask first?</a:t>
             </a:r>
@@ -11745,7 +11470,7 @@
                 <a:solidFill>
                   <a:srgbClr val="34322F"/>
                 </a:solidFill>
-                <a:latin typeface="Karla"/>
+                <a:latin typeface="Calibri"/>
               </a:rPr>
               <a:t>Write your answers in the last box of your evidence sheet. It is yours to keep, and nothing is read out.</a:t>
             </a:r>
@@ -11813,7 +11538,7 @@
                 <a:solidFill>
                   <a:srgbClr val="8C877D"/>
                 </a:solidFill>
-                <a:latin typeface="Karla"/>
+                <a:latin typeface="Calibri"/>
               </a:rPr>
               <a:t>The Pastoral Guide</a:t>
             </a:r>
@@ -11856,7 +11581,7 @@
                 <a:solidFill>
                   <a:srgbClr val="8C877D"/>
                 </a:solidFill>
-                <a:latin typeface="Karla"/>
+                <a:latin typeface="Calibri"/>
               </a:rPr>
               <a:t>18 / 19</a:t>
             </a:r>
@@ -11973,7 +11698,7 @@
                 <a:solidFill>
                   <a:srgbClr val="34322F"/>
                 </a:solidFill>
-                <a:latin typeface="Karla"/>
+                <a:latin typeface="Calibri"/>
               </a:rPr>
               <a:t>FOR THE TEACHER  ·  SOURCES</a:t>
             </a:r>
@@ -12012,11 +11737,11 @@
               </a:spcAft>
             </a:pPr>
             <a:r>
-              <a:rPr sz="2600" b="1" i="0">
+              <a:rPr sz="2600" b="0" i="0">
                 <a:solidFill>
                   <a:srgbClr val="262422"/>
                 </a:solidFill>
-                <a:latin typeface="Libre Caslon Display"/>
+                <a:latin typeface="Georgia"/>
               </a:rPr>
               <a:t>Where the evidence came from</a:t>
             </a:r>
@@ -12059,7 +11784,7 @@
                 <a:solidFill>
                   <a:srgbClr val="262422"/>
                 </a:solidFill>
-                <a:latin typeface="Karla"/>
+                <a:latin typeface="Calibri"/>
               </a:rPr>
               <a:t>Doll R. and Hill A. B. (1950). Smoking and carcinoma of the lung. British Medical Journal, 2(4682), 739–748.</a:t>
             </a:r>
@@ -12102,7 +11827,7 @@
                 <a:solidFill>
                   <a:srgbClr val="262422"/>
                 </a:solidFill>
-                <a:latin typeface="Karla"/>
+                <a:latin typeface="Calibri"/>
               </a:rPr>
               <a:t>Doll R. and Hill A. B. (1964). Mortality in relation to smoking: ten years’ observations of British doctors. British Medical Journal, 1, 1399–1410. Rates as set out in the CDC’s case study on this work.</a:t>
             </a:r>
@@ -12145,7 +11870,7 @@
                 <a:solidFill>
                   <a:srgbClr val="262422"/>
                 </a:solidFill>
-                <a:latin typeface="Karla"/>
+                <a:latin typeface="Calibri"/>
               </a:rPr>
               <a:t>Center for the Study of Tobacco and Society, University of Alabama: More Doctors Smoke Camels.</a:t>
             </a:r>
@@ -12213,7 +11938,7 @@
                 <a:solidFill>
                   <a:srgbClr val="8C877D"/>
                 </a:solidFill>
-                <a:latin typeface="Karla"/>
+                <a:latin typeface="Calibri"/>
               </a:rPr>
               <a:t>The Pastoral Guide</a:t>
             </a:r>
@@ -12256,7 +11981,7 @@
                 <a:solidFill>
                   <a:srgbClr val="8C877D"/>
                 </a:solidFill>
-                <a:latin typeface="Karla"/>
+                <a:latin typeface="Calibri"/>
               </a:rPr>
               <a:t>19 / 19</a:t>
             </a:r>
@@ -12373,7 +12098,7 @@
                 <a:solidFill>
                   <a:srgbClr val="34322F"/>
                 </a:solidFill>
-                <a:latin typeface="Karla"/>
+                <a:latin typeface="Calibri"/>
               </a:rPr>
               <a:t>TEACHER SLIDE  ·  SKIP IT</a:t>
             </a:r>
@@ -12412,11 +12137,11 @@
               </a:spcAft>
             </a:pPr>
             <a:r>
-              <a:rPr sz="2800" b="1" i="0">
+              <a:rPr sz="2800" b="0" i="0">
                 <a:solidFill>
                   <a:srgbClr val="262422"/>
                 </a:solidFill>
-                <a:latin typeface="Libre Caslon Display"/>
+                <a:latin typeface="Georgia"/>
               </a:rPr>
               <a:t>Before the lesson</a:t>
             </a:r>
@@ -12459,7 +12184,7 @@
                 <a:solidFill>
                   <a:srgbClr val="56524B"/>
                 </a:solidFill>
-                <a:latin typeface="Karla"/>
+                <a:latin typeface="Calibri"/>
               </a:rPr>
               <a:t>This lesson is about how adverts used doctors to sell cigarettes, and the study that tested the claim.</a:t>
             </a:r>
@@ -12590,7 +12315,7 @@
                 <a:solidFill>
                   <a:srgbClr val="FFFDF7"/>
                 </a:solidFill>
-                <a:latin typeface="Karla"/>
+                <a:latin typeface="Calibri"/>
               </a:rPr>
               <a:t>1</a:t>
             </a:r>
@@ -12629,11 +12354,11 @@
               </a:spcAft>
             </a:pPr>
             <a:r>
-              <a:rPr sz="1300" b="1" i="0">
+              <a:rPr sz="1300" b="0" i="0">
                 <a:solidFill>
                   <a:srgbClr val="262422"/>
                 </a:solidFill>
-                <a:latin typeface="Libre Caslon Display"/>
+                <a:latin typeface="Georgia"/>
               </a:rPr>
               <a:t>Print and cut the evidence cards</a:t>
             </a:r>
@@ -12676,7 +12401,7 @@
                 <a:solidFill>
                   <a:srgbClr val="56524B"/>
                 </a:solidFill>
-                <a:latin typeface="Karla"/>
+                <a:latin typeface="Calibri"/>
               </a:rPr>
               <a:t>One set of four per group of three or four. Keep them in order, A to D.</a:t>
             </a:r>
@@ -12807,7 +12532,7 @@
                 <a:solidFill>
                   <a:srgbClr val="FFFDF7"/>
                 </a:solidFill>
-                <a:latin typeface="Karla"/>
+                <a:latin typeface="Calibri"/>
               </a:rPr>
               <a:t>2</a:t>
             </a:r>
@@ -12846,11 +12571,11 @@
               </a:spcAft>
             </a:pPr>
             <a:r>
-              <a:rPr sz="1300" b="1" i="0">
+              <a:rPr sz="1300" b="0" i="0">
                 <a:solidFill>
                   <a:srgbClr val="262422"/>
                 </a:solidFill>
-                <a:latin typeface="Libre Caslon Display"/>
+                <a:latin typeface="Georgia"/>
               </a:rPr>
               <a:t>Print two sheets per student</a:t>
             </a:r>
@@ -12893,7 +12618,7 @@
                 <a:solidFill>
                   <a:srgbClr val="56524B"/>
                 </a:solidFill>
-                <a:latin typeface="Karla"/>
+                <a:latin typeface="Calibri"/>
               </a:rPr>
               <a:t>This lesson’s evidence sheet, and the front page sheet, which is the same every lesson.</a:t>
             </a:r>
@@ -13024,7 +12749,7 @@
                 <a:solidFill>
                   <a:srgbClr val="FFFDF7"/>
                 </a:solidFill>
-                <a:latin typeface="Karla"/>
+                <a:latin typeface="Calibri"/>
               </a:rPr>
               <a:t>3</a:t>
             </a:r>
@@ -13063,11 +12788,11 @@
               </a:spcAft>
             </a:pPr>
             <a:r>
-              <a:rPr sz="1300" b="1" i="0">
+              <a:rPr sz="1300" b="0" i="0">
                 <a:solidFill>
                   <a:srgbClr val="262422"/>
                 </a:solidFill>
-                <a:latin typeface="Libre Caslon Display"/>
+                <a:latin typeface="Georgia"/>
               </a:rPr>
               <a:t>Mark out the line</a:t>
             </a:r>
@@ -13110,7 +12835,7 @@
                 <a:solidFill>
                   <a:srgbClr val="56524B"/>
                 </a:solidFill>
-                <a:latin typeface="Karla"/>
+                <a:latin typeface="Calibri"/>
               </a:rPr>
               <a:t>A 0 at one end of the room and a 10 at the other: definitely false to definitely true.</a:t>
             </a:r>
@@ -13241,7 +12966,7 @@
                 <a:solidFill>
                   <a:srgbClr val="FFFDF7"/>
                 </a:solidFill>
-                <a:latin typeface="Karla"/>
+                <a:latin typeface="Calibri"/>
               </a:rPr>
               <a:t>4</a:t>
             </a:r>
@@ -13280,11 +13005,11 @@
               </a:spcAft>
             </a:pPr>
             <a:r>
-              <a:rPr sz="1300" b="1" i="0">
+              <a:rPr sz="1300" b="0" i="0">
                 <a:solidFill>
                   <a:srgbClr val="262422"/>
                 </a:solidFill>
-                <a:latin typeface="Libre Caslon Display"/>
+                <a:latin typeface="Georgia"/>
               </a:rPr>
               <a:t>Hold the cards back</a:t>
             </a:r>
@@ -13327,7 +13052,7 @@
                 <a:solidFill>
                   <a:srgbClr val="56524B"/>
                 </a:solidFill>
-                <a:latin typeface="Karla"/>
+                <a:latin typeface="Calibri"/>
               </a:rPr>
               <a:t>Hand out one card per round, never the next one early. The verdict stays hidden until the end.</a:t>
             </a:r>
@@ -13395,7 +13120,7 @@
                 <a:solidFill>
                   <a:srgbClr val="8C877D"/>
                 </a:solidFill>
-                <a:latin typeface="Karla"/>
+                <a:latin typeface="Calibri"/>
               </a:rPr>
               <a:t>The Pastoral Guide</a:t>
             </a:r>
@@ -13438,7 +13163,7 @@
                 <a:solidFill>
                   <a:srgbClr val="8C877D"/>
                 </a:solidFill>
-                <a:latin typeface="Karla"/>
+                <a:latin typeface="Calibri"/>
               </a:rPr>
               <a:t>2 / 19</a:t>
             </a:r>
@@ -13543,7 +13268,7 @@
                 <a:solidFill>
                   <a:srgbClr val="34322F"/>
                 </a:solidFill>
-                <a:latin typeface="Karla"/>
+                <a:latin typeface="Calibri"/>
               </a:rPr>
               <a:t>QUESTION THE HEADLINE  ·  LESSON 3 OF 5</a:t>
             </a:r>
@@ -13586,7 +13311,7 @@
                 <a:solidFill>
                   <a:srgbClr val="8C877D"/>
                 </a:solidFill>
-                <a:latin typeface="Karla"/>
+                <a:latin typeface="Calibri"/>
               </a:rPr>
               <a:t>A recreated front page</a:t>
             </a:r>
@@ -13669,11 +13394,11 @@
               </a:spcAft>
             </a:pPr>
             <a:r>
-              <a:rPr sz="3000" b="1" i="0">
+              <a:rPr sz="3000" b="0" i="0">
                 <a:solidFill>
                   <a:srgbClr val="262422"/>
                 </a:solidFill>
-                <a:latin typeface="Libre Caslon Display"/>
+                <a:latin typeface="Georgia"/>
               </a:rPr>
               <a:t>The Daily Claim</a:t>
             </a:r>
@@ -13760,7 +13485,7 @@
                 <a:solidFill>
                   <a:srgbClr val="56524B"/>
                 </a:solidFill>
-                <a:latin typeface="Karla"/>
+                <a:latin typeface="Calibri"/>
               </a:rPr>
               <a:t>NEW YORK, 1946</a:t>
             </a:r>
@@ -13803,7 +13528,7 @@
                 <a:solidFill>
                   <a:srgbClr val="56524B"/>
                 </a:solidFill>
-                <a:latin typeface="Karla"/>
+                <a:latin typeface="Calibri"/>
               </a:rPr>
               <a:t>VOLUME ONE</a:t>
             </a:r>
@@ -13846,7 +13571,7 @@
                 <a:solidFill>
                   <a:srgbClr val="56524B"/>
                 </a:solidFill>
-                <a:latin typeface="Karla"/>
+                <a:latin typeface="Calibri"/>
               </a:rPr>
               <a:t>LESSON 3 OF 5</a:t>
             </a:r>
@@ -13929,11 +13654,11 @@
               </a:spcAft>
             </a:pPr>
             <a:r>
-              <a:rPr sz="2800" b="1" i="0">
+              <a:rPr sz="2800" b="0" i="0">
                 <a:solidFill>
                   <a:srgbClr val="262422"/>
                 </a:solidFill>
-                <a:latin typeface="Libre Caslon Display"/>
+                <a:latin typeface="Georgia"/>
               </a:rPr>
               <a:t>MORE DOCTORS SMOKE CAMELS</a:t>
             </a:r>
@@ -13941,11 +13666,11 @@
               <a:rPr lang="en-GB"/>
             </a:br>
             <a:r>
-              <a:rPr sz="2800" b="1" i="0">
+              <a:rPr sz="2800" b="0" i="0">
                 <a:solidFill>
                   <a:srgbClr val="262422"/>
                 </a:solidFill>
-                <a:latin typeface="Libre Caslon Display"/>
+                <a:latin typeface="Georgia"/>
               </a:rPr>
               <a:t>THAN ANY OTHER CIGARETTE</a:t>
             </a:r>
@@ -14333,11 +14058,11 @@
               </a:spcAft>
             </a:pPr>
             <a:r>
-              <a:rPr sz="1500" b="1" i="0">
+              <a:rPr sz="1500" b="0" i="0">
                 <a:solidFill>
                   <a:srgbClr val="34322F"/>
                 </a:solidFill>
-                <a:latin typeface="Libre Caslon Display"/>
+                <a:latin typeface="Georgia"/>
               </a:rPr>
               <a:t>“More doctors smoke Camels than any other cigarette.”</a:t>
             </a:r>
@@ -14380,7 +14105,7 @@
                 <a:solidFill>
                   <a:srgbClr val="56524B"/>
                 </a:solidFill>
-                <a:latin typeface="Karla"/>
+                <a:latin typeface="Calibri"/>
               </a:rPr>
               <a:t>THE ADVERT’S SLOGAN, 1946</a:t>
             </a:r>
@@ -14448,7 +14173,7 @@
                 <a:solidFill>
                   <a:srgbClr val="8C877D"/>
                 </a:solidFill>
-                <a:latin typeface="Karla"/>
+                <a:latin typeface="Calibri"/>
               </a:rPr>
               <a:t>The Pastoral Guide</a:t>
             </a:r>
@@ -14491,7 +14216,7 @@
                 <a:solidFill>
                   <a:srgbClr val="8C877D"/>
                 </a:solidFill>
-                <a:latin typeface="Karla"/>
+                <a:latin typeface="Calibri"/>
               </a:rPr>
               <a:t>3 / 19</a:t>
             </a:r>
@@ -14596,64 +14321,9 @@
                 <a:solidFill>
                   <a:srgbClr val="34322F"/>
                 </a:solidFill>
-                <a:latin typeface="Karla"/>
+                <a:latin typeface="Calibri"/>
               </a:rPr>
               <a:t>QUESTION THE HEADLINE  ·  LESSON 3 OF 5</a:t>
-            </a:r>
-          </a:p>
-        </p:txBody>
-      </p:sp>
-      <p:sp>
-        <p:nvSpPr>
-          <p:cNvPr id="4" name="Rounded Rectangle 3"/>
-          <p:cNvSpPr/>
-          <p:nvPr/>
-        </p:nvSpPr>
-        <p:spPr>
-          <a:xfrm>
-            <a:off x="7398742" y="246888"/>
-            <a:ext cx="1059457" cy="237744"/>
-          </a:xfrm>
-          <a:prstGeom prst="roundRect">
-            <a:avLst>
-              <a:gd name="adj" fmla="val 50000"/>
-            </a:avLst>
-          </a:prstGeom>
-          <a:solidFill>
-            <a:srgbClr val="34322F"/>
-          </a:solidFill>
-          <a:ln>
-            <a:noFill/>
-          </a:ln>
-          <a:effectLst/>
-        </p:spPr>
-        <p:style>
-          <a:lnRef idx="1">
-            <a:schemeClr val="accent1"/>
-          </a:lnRef>
-          <a:fillRef idx="3">
-            <a:schemeClr val="accent1"/>
-          </a:fillRef>
-          <a:effectRef idx="0">
-            <a:schemeClr val="accent1"/>
-          </a:effectRef>
-          <a:fontRef idx="minor">
-            <a:schemeClr val="lt1"/>
-          </a:fontRef>
-        </p:style>
-        <p:txBody>
-          <a:bodyPr rtlCol="0" anchor="ctr" wrap="none" lIns="0" rIns="0" tIns="0" bIns="0"/>
-          <a:lstStyle/>
-          <a:p>
-            <a:pPr algn="ctr"/>
-            <a:r>
-              <a:rPr sz="950" b="1" spc="90">
-                <a:solidFill>
-                  <a:srgbClr val="FFFDF7"/>
-                </a:solidFill>
-                <a:latin typeface="Karla"/>
-              </a:rPr>
-              <a:t>STAND UP</a:t>
             </a:r>
           </a:p>
         </p:txBody>
@@ -14690,11 +14360,11 @@
               </a:spcAft>
             </a:pPr>
             <a:r>
-              <a:rPr sz="2800" b="1" i="0">
+              <a:rPr sz="2800" b="0" i="0">
                 <a:solidFill>
                   <a:srgbClr val="262422"/>
                 </a:solidFill>
-                <a:latin typeface="Libre Caslon Display"/>
+                <a:latin typeface="Georgia"/>
               </a:rPr>
               <a:t>How much do you believe it?</a:t>
             </a:r>
@@ -14827,11 +14497,11 @@
               </a:spcAft>
             </a:pPr>
             <a:r>
-              <a:rPr sz="1800" b="1" i="0">
+              <a:rPr sz="1800" b="0" i="0">
                 <a:solidFill>
                   <a:srgbClr val="262422"/>
                 </a:solidFill>
-                <a:latin typeface="Libre Caslon Display"/>
+                <a:latin typeface="Georgia"/>
               </a:rPr>
               <a:t>“If doctors smoke them, cigarettes can’t be that bad for you.”</a:t>
             </a:r>
@@ -14962,7 +14632,7 @@
                 <a:solidFill>
                   <a:srgbClr val="262422"/>
                 </a:solidFill>
-                <a:latin typeface="Karla"/>
+                <a:latin typeface="Calibri"/>
               </a:rPr>
               <a:t>0</a:t>
             </a:r>
@@ -15049,7 +14719,7 @@
                 <a:solidFill>
                   <a:srgbClr val="56524B"/>
                 </a:solidFill>
-                <a:latin typeface="Karla"/>
+                <a:latin typeface="Calibri"/>
               </a:rPr>
               <a:t>1</a:t>
             </a:r>
@@ -15136,7 +14806,7 @@
                 <a:solidFill>
                   <a:srgbClr val="56524B"/>
                 </a:solidFill>
-                <a:latin typeface="Karla"/>
+                <a:latin typeface="Calibri"/>
               </a:rPr>
               <a:t>2</a:t>
             </a:r>
@@ -15223,7 +14893,7 @@
                 <a:solidFill>
                   <a:srgbClr val="56524B"/>
                 </a:solidFill>
-                <a:latin typeface="Karla"/>
+                <a:latin typeface="Calibri"/>
               </a:rPr>
               <a:t>3</a:t>
             </a:r>
@@ -15310,7 +14980,7 @@
                 <a:solidFill>
                   <a:srgbClr val="56524B"/>
                 </a:solidFill>
-                <a:latin typeface="Karla"/>
+                <a:latin typeface="Calibri"/>
               </a:rPr>
               <a:t>4</a:t>
             </a:r>
@@ -15397,7 +15067,7 @@
                 <a:solidFill>
                   <a:srgbClr val="262422"/>
                 </a:solidFill>
-                <a:latin typeface="Karla"/>
+                <a:latin typeface="Calibri"/>
               </a:rPr>
               <a:t>5</a:t>
             </a:r>
@@ -15484,7 +15154,7 @@
                 <a:solidFill>
                   <a:srgbClr val="56524B"/>
                 </a:solidFill>
-                <a:latin typeface="Karla"/>
+                <a:latin typeface="Calibri"/>
               </a:rPr>
               <a:t>6</a:t>
             </a:r>
@@ -15571,7 +15241,7 @@
                 <a:solidFill>
                   <a:srgbClr val="56524B"/>
                 </a:solidFill>
-                <a:latin typeface="Karla"/>
+                <a:latin typeface="Calibri"/>
               </a:rPr>
               <a:t>7</a:t>
             </a:r>
@@ -15658,7 +15328,7 @@
                 <a:solidFill>
                   <a:srgbClr val="56524B"/>
                 </a:solidFill>
-                <a:latin typeface="Karla"/>
+                <a:latin typeface="Calibri"/>
               </a:rPr>
               <a:t>8</a:t>
             </a:r>
@@ -15745,7 +15415,7 @@
                 <a:solidFill>
                   <a:srgbClr val="56524B"/>
                 </a:solidFill>
-                <a:latin typeface="Karla"/>
+                <a:latin typeface="Calibri"/>
               </a:rPr>
               <a:t>9</a:t>
             </a:r>
@@ -15832,7 +15502,7 @@
                 <a:solidFill>
                   <a:srgbClr val="262422"/>
                 </a:solidFill>
-                <a:latin typeface="Karla"/>
+                <a:latin typeface="Calibri"/>
               </a:rPr>
               <a:t>10</a:t>
             </a:r>
@@ -15875,7 +15545,7 @@
                 <a:solidFill>
                   <a:srgbClr val="34322F"/>
                 </a:solidFill>
-                <a:latin typeface="Karla"/>
+                <a:latin typeface="Calibri"/>
               </a:rPr>
               <a:t>Definitely false</a:t>
             </a:r>
@@ -15918,7 +15588,7 @@
                 <a:solidFill>
                   <a:srgbClr val="34322F"/>
                 </a:solidFill>
-                <a:latin typeface="Karla"/>
+                <a:latin typeface="Calibri"/>
               </a:rPr>
               <a:t>Definitely true</a:t>
             </a:r>
@@ -15961,7 +15631,7 @@
                 <a:solidFill>
                   <a:srgbClr val="34322F"/>
                 </a:solidFill>
-                <a:latin typeface="Karla"/>
+                <a:latin typeface="Calibri"/>
               </a:rPr>
               <a:t>Stand on the line where you are now. Two or three people say why they are standing there.</a:t>
             </a:r>
@@ -16029,7 +15699,7 @@
                 <a:solidFill>
                   <a:srgbClr val="8C877D"/>
                 </a:solidFill>
-                <a:latin typeface="Karla"/>
+                <a:latin typeface="Calibri"/>
               </a:rPr>
               <a:t>The Pastoral Guide</a:t>
             </a:r>
@@ -16072,7 +15742,7 @@
                 <a:solidFill>
                   <a:srgbClr val="8C877D"/>
                 </a:solidFill>
-                <a:latin typeface="Karla"/>
+                <a:latin typeface="Calibri"/>
               </a:rPr>
               <a:t>4 / 19</a:t>
             </a:r>
@@ -16177,64 +15847,9 @@
                 <a:solidFill>
                   <a:srgbClr val="34322F"/>
                 </a:solidFill>
-                <a:latin typeface="Karla"/>
+                <a:latin typeface="Calibri"/>
               </a:rPr>
               <a:t>QUESTION THE HEADLINE  ·  LESSON 3 OF 5</a:t>
-            </a:r>
-          </a:p>
-        </p:txBody>
-      </p:sp>
-      <p:sp>
-        <p:nvSpPr>
-          <p:cNvPr id="4" name="Rounded Rectangle 3"/>
-          <p:cNvSpPr/>
-          <p:nvPr/>
-        </p:nvSpPr>
-        <p:spPr>
-          <a:xfrm>
-            <a:off x="7658580" y="246888"/>
-            <a:ext cx="799619" cy="237744"/>
-          </a:xfrm>
-          <a:prstGeom prst="roundRect">
-            <a:avLst>
-              <a:gd name="adj" fmla="val 50000"/>
-            </a:avLst>
-          </a:prstGeom>
-          <a:solidFill>
-            <a:srgbClr val="34322F"/>
-          </a:solidFill>
-          <a:ln>
-            <a:noFill/>
-          </a:ln>
-          <a:effectLst/>
-        </p:spPr>
-        <p:style>
-          <a:lnRef idx="1">
-            <a:schemeClr val="accent1"/>
-          </a:lnRef>
-          <a:fillRef idx="3">
-            <a:schemeClr val="accent1"/>
-          </a:fillRef>
-          <a:effectRef idx="0">
-            <a:schemeClr val="accent1"/>
-          </a:effectRef>
-          <a:fontRef idx="minor">
-            <a:schemeClr val="lt1"/>
-          </a:fontRef>
-        </p:style>
-        <p:txBody>
-          <a:bodyPr rtlCol="0" anchor="ctr" wrap="none" lIns="0" rIns="0" tIns="0" bIns="0"/>
-          <a:lstStyle/>
-          <a:p>
-            <a:pPr algn="ctr"/>
-            <a:r>
-              <a:rPr sz="950" b="1" spc="90">
-                <a:solidFill>
-                  <a:srgbClr val="FFFDF7"/>
-                </a:solidFill>
-                <a:latin typeface="Karla"/>
-              </a:rPr>
-              <a:t>TEACH</a:t>
             </a:r>
           </a:p>
         </p:txBody>
@@ -16271,11 +15886,11 @@
               </a:spcAft>
             </a:pPr>
             <a:r>
-              <a:rPr sz="2800" b="1" i="0">
+              <a:rPr sz="2800" b="0" i="0">
                 <a:solidFill>
                   <a:srgbClr val="262422"/>
                 </a:solidFill>
-                <a:latin typeface="Libre Caslon Display"/>
+                <a:latin typeface="Georgia"/>
               </a:rPr>
               <a:t>Five questions for any headline</a:t>
             </a:r>
@@ -16427,11 +16042,11 @@
               </a:spcAft>
             </a:pPr>
             <a:r>
-              <a:rPr sz="1300" b="1" i="0">
+              <a:rPr sz="1300" b="0" i="0">
                 <a:solidFill>
                   <a:srgbClr val="262422"/>
                 </a:solidFill>
-                <a:latin typeface="Libre Caslon Display"/>
+                <a:latin typeface="Georgia"/>
               </a:rPr>
               <a:t>Who is saying it?</a:t>
             </a:r>
@@ -16474,7 +16089,7 @@
                 <a:solidFill>
                   <a:srgbClr val="56524B"/>
                 </a:solidFill>
-                <a:latin typeface="Karla"/>
+                <a:latin typeface="Calibri"/>
               </a:rPr>
               <a:t>A company, a scientist, a newspaper, a government? Check the name.</a:t>
             </a:r>
@@ -16626,11 +16241,11 @@
               </a:spcAft>
             </a:pPr>
             <a:r>
-              <a:rPr sz="1300" b="1" i="0">
+              <a:rPr sz="1300" b="0" i="0">
                 <a:solidFill>
                   <a:srgbClr val="262422"/>
                 </a:solidFill>
-                <a:latin typeface="Libre Caslon Display"/>
+                <a:latin typeface="Georgia"/>
               </a:rPr>
               <a:t>Who gains if I believe it?</a:t>
             </a:r>
@@ -16673,7 +16288,7 @@
                 <a:solidFill>
                   <a:srgbClr val="56524B"/>
                 </a:solidFill>
-                <a:latin typeface="Karla"/>
+                <a:latin typeface="Calibri"/>
               </a:rPr>
               <a:t>Somebody always does. Work out who, and what they get.</a:t>
             </a:r>
@@ -16825,11 +16440,11 @@
               </a:spcAft>
             </a:pPr>
             <a:r>
-              <a:rPr sz="1300" b="1" i="0">
+              <a:rPr sz="1300" b="0" i="0">
                 <a:solidFill>
                   <a:srgbClr val="262422"/>
                 </a:solidFill>
-                <a:latin typeface="Libre Caslon Display"/>
+                <a:latin typeface="Georgia"/>
               </a:rPr>
               <a:t>Who paid for it?</a:t>
             </a:r>
@@ -16872,7 +16487,7 @@
                 <a:solidFill>
                   <a:srgbClr val="56524B"/>
                 </a:solidFill>
-                <a:latin typeface="Karla"/>
+                <a:latin typeface="Calibri"/>
               </a:rPr>
               <a:t>The research, the advert, the survey. Money does not make it false, but you should know.</a:t>
             </a:r>
@@ -17024,11 +16639,11 @@
               </a:spcAft>
             </a:pPr>
             <a:r>
-              <a:rPr sz="1300" b="1" i="0">
+              <a:rPr sz="1300" b="0" i="0">
                 <a:solidFill>
                   <a:srgbClr val="262422"/>
                 </a:solidFill>
-                <a:latin typeface="Libre Caslon Display"/>
+                <a:latin typeface="Georgia"/>
               </a:rPr>
               <a:t>What is the evidence?</a:t>
             </a:r>
@@ -17071,7 +16686,7 @@
                 <a:solidFill>
                   <a:srgbClr val="56524B"/>
                 </a:solidFill>
-                <a:latin typeface="Karla"/>
+                <a:latin typeface="Calibri"/>
               </a:rPr>
               <a:t>A study, a number, a graph? Or only a slogan and a famous face?</a:t>
             </a:r>
@@ -17223,11 +16838,11 @@
               </a:spcAft>
             </a:pPr>
             <a:r>
-              <a:rPr sz="1300" b="1" i="0">
+              <a:rPr sz="1300" b="0" i="0">
                 <a:solidFill>
                   <a:srgbClr val="262422"/>
                 </a:solidFill>
-                <a:latin typeface="Libre Caslon Display"/>
+                <a:latin typeface="Georgia"/>
               </a:rPr>
               <a:t>Has it been tested, and by whom?</a:t>
             </a:r>
@@ -17270,7 +16885,7 @@
                 <a:solidFill>
                   <a:srgbClr val="56524B"/>
                 </a:solidFill>
-                <a:latin typeface="Karla"/>
+                <a:latin typeface="Calibri"/>
               </a:rPr>
               <a:t>Tested on whom, for how long, and by somebody with nothing to gain?</a:t>
             </a:r>
@@ -17313,7 +16928,7 @@
                 <a:solidFill>
                   <a:srgbClr val="34322F"/>
                 </a:solidFill>
-                <a:latin typeface="Karla"/>
+                <a:latin typeface="Calibri"/>
               </a:rPr>
               <a:t>These five come back in every lesson. The first one is on the front page already.</a:t>
             </a:r>
@@ -17381,7 +16996,7 @@
                 <a:solidFill>
                   <a:srgbClr val="8C877D"/>
                 </a:solidFill>
-                <a:latin typeface="Karla"/>
+                <a:latin typeface="Calibri"/>
               </a:rPr>
               <a:t>The Pastoral Guide</a:t>
             </a:r>
@@ -17424,7 +17039,7 @@
                 <a:solidFill>
                   <a:srgbClr val="8C877D"/>
                 </a:solidFill>
-                <a:latin typeface="Karla"/>
+                <a:latin typeface="Calibri"/>
               </a:rPr>
               <a:t>5 / 19</a:t>
             </a:r>
@@ -17529,7 +17144,7 @@
                 <a:solidFill>
                   <a:srgbClr val="34322F"/>
                 </a:solidFill>
-                <a:latin typeface="Karla"/>
+                <a:latin typeface="Calibri"/>
               </a:rPr>
               <a:t>QUESTION THE HEADLINE  ·  LESSON 3 OF 5</a:t>
             </a:r>
@@ -17538,19 +17153,147 @@
       </p:sp>
       <p:sp>
         <p:nvSpPr>
-          <p:cNvPr id="4" name="Rounded Rectangle 3"/>
+          <p:cNvPr id="5" name="TextBox 4"/>
+          <p:cNvSpPr txBox="1"/>
+          <p:nvPr/>
+        </p:nvSpPr>
+        <p:spPr>
+          <a:xfrm>
+            <a:off x="685800" y="566928"/>
+            <a:ext cx="7772400" cy="434848"/>
+          </a:xfrm>
+          <a:prstGeom prst="rect">
+            <a:avLst/>
+          </a:prstGeom>
+          <a:noFill/>
+          <a:effectLst/>
+        </p:spPr>
+        <p:txBody>
+          <a:bodyPr wrap="square" anchor="t" lIns="0" rIns="0" tIns="0" bIns="0">
+            <a:spAutoFit/>
+          </a:bodyPr>
+          <a:lstStyle/>
+          <a:p>
+            <a:pPr algn="l">
+              <a:lnSpc>
+                <a:spcPct val="105000"/>
+              </a:lnSpc>
+              <a:spcAft>
+                <a:spcPts val="0"/>
+              </a:spcAft>
+            </a:pPr>
+            <a:r>
+              <a:rPr sz="2800" b="0" i="0">
+                <a:solidFill>
+                  <a:srgbClr val="262422"/>
+                </a:solidFill>
+                <a:latin typeface="Georgia"/>
+              </a:rPr>
+              <a:t>Watch the first one</a:t>
+            </a:r>
+          </a:p>
+        </p:txBody>
+      </p:sp>
+      <p:sp>
+        <p:nvSpPr>
+          <p:cNvPr id="6" name="TextBox 5"/>
+          <p:cNvSpPr txBox="1"/>
+          <p:nvPr/>
+        </p:nvSpPr>
+        <p:spPr>
+          <a:xfrm>
+            <a:off x="685800" y="1170432"/>
+            <a:ext cx="7772400" cy="274320"/>
+          </a:xfrm>
+          <a:prstGeom prst="rect">
+            <a:avLst/>
+          </a:prstGeom>
+          <a:noFill/>
+          <a:effectLst/>
+        </p:spPr>
+        <p:txBody>
+          <a:bodyPr wrap="square" anchor="t" lIns="0" rIns="0" tIns="0" bIns="0">
+            <a:spAutoFit/>
+          </a:bodyPr>
+          <a:lstStyle/>
+          <a:p>
+            <a:pPr algn="l">
+              <a:lnSpc>
+                <a:spcPct val="125000"/>
+              </a:lnSpc>
+              <a:spcAft>
+                <a:spcPts val="0"/>
+              </a:spcAft>
+            </a:pPr>
+            <a:r>
+              <a:rPr sz="1600" b="0" i="0">
+                <a:solidFill>
+                  <a:srgbClr val="34322F"/>
+                </a:solidFill>
+                <a:latin typeface="Georgia"/>
+              </a:rPr>
+              <a:t>Question 1:  Who is saying it?</a:t>
+            </a:r>
+          </a:p>
+        </p:txBody>
+      </p:sp>
+      <p:sp>
+        <p:nvSpPr>
+          <p:cNvPr id="7" name="Rectangle 6"/>
           <p:cNvSpPr/>
           <p:nvPr/>
         </p:nvSpPr>
         <p:spPr>
           <a:xfrm>
-            <a:off x="7624101" y="246888"/>
-            <a:ext cx="834098" cy="237744"/>
-          </a:xfrm>
-          <a:prstGeom prst="roundRect">
-            <a:avLst>
-              <a:gd name="adj" fmla="val 50000"/>
-            </a:avLst>
+            <a:off x="685800" y="1609344"/>
+            <a:ext cx="7772400" cy="1249680"/>
+          </a:xfrm>
+          <a:prstGeom prst="rect">
+            <a:avLst/>
+          </a:prstGeom>
+          <a:solidFill>
+            <a:srgbClr val="FFFFFF"/>
+          </a:solidFill>
+          <a:ln>
+            <a:noFill/>
+          </a:ln>
+          <a:effectLst/>
+        </p:spPr>
+        <p:style>
+          <a:lnRef idx="1">
+            <a:schemeClr val="accent1"/>
+          </a:lnRef>
+          <a:fillRef idx="3">
+            <a:schemeClr val="accent1"/>
+          </a:fillRef>
+          <a:effectRef idx="0">
+            <a:schemeClr val="accent1"/>
+          </a:effectRef>
+          <a:fontRef idx="minor">
+            <a:schemeClr val="lt1"/>
+          </a:fontRef>
+        </p:style>
+        <p:txBody>
+          <a:bodyPr rtlCol="0" anchor="ctr"/>
+          <a:lstStyle/>
+          <a:p>
+            <a:pPr algn="ctr"/>
+          </a:p>
+        </p:txBody>
+      </p:sp>
+      <p:sp>
+        <p:nvSpPr>
+          <p:cNvPr id="8" name="Rectangle 7"/>
+          <p:cNvSpPr/>
+          <p:nvPr/>
+        </p:nvSpPr>
+        <p:spPr>
+          <a:xfrm>
+            <a:off x="685800" y="1609344"/>
+            <a:ext cx="45720" cy="1249680"/>
+          </a:xfrm>
+          <a:prstGeom prst="rect">
+            <a:avLst/>
           </a:prstGeom>
           <a:solidFill>
             <a:srgbClr val="34322F"/>
@@ -17575,189 +17318,6 @@
           </a:fontRef>
         </p:style>
         <p:txBody>
-          <a:bodyPr rtlCol="0" anchor="ctr" wrap="none" lIns="0" rIns="0" tIns="0" bIns="0"/>
-          <a:lstStyle/>
-          <a:p>
-            <a:pPr algn="ctr"/>
-            <a:r>
-              <a:rPr sz="950" b="1" spc="90">
-                <a:solidFill>
-                  <a:srgbClr val="FFFDF7"/>
-                </a:solidFill>
-                <a:latin typeface="Karla"/>
-              </a:rPr>
-              <a:t>MODEL</a:t>
-            </a:r>
-          </a:p>
-        </p:txBody>
-      </p:sp>
-      <p:sp>
-        <p:nvSpPr>
-          <p:cNvPr id="5" name="TextBox 4"/>
-          <p:cNvSpPr txBox="1"/>
-          <p:nvPr/>
-        </p:nvSpPr>
-        <p:spPr>
-          <a:xfrm>
-            <a:off x="685800" y="566928"/>
-            <a:ext cx="7772400" cy="434848"/>
-          </a:xfrm>
-          <a:prstGeom prst="rect">
-            <a:avLst/>
-          </a:prstGeom>
-          <a:noFill/>
-          <a:effectLst/>
-        </p:spPr>
-        <p:txBody>
-          <a:bodyPr wrap="square" anchor="t" lIns="0" rIns="0" tIns="0" bIns="0">
-            <a:spAutoFit/>
-          </a:bodyPr>
-          <a:lstStyle/>
-          <a:p>
-            <a:pPr algn="l">
-              <a:lnSpc>
-                <a:spcPct val="105000"/>
-              </a:lnSpc>
-              <a:spcAft>
-                <a:spcPts val="0"/>
-              </a:spcAft>
-            </a:pPr>
-            <a:r>
-              <a:rPr sz="2800" b="1" i="0">
-                <a:solidFill>
-                  <a:srgbClr val="262422"/>
-                </a:solidFill>
-                <a:latin typeface="Libre Caslon Display"/>
-              </a:rPr>
-              <a:t>Watch the first one</a:t>
-            </a:r>
-          </a:p>
-        </p:txBody>
-      </p:sp>
-      <p:sp>
-        <p:nvSpPr>
-          <p:cNvPr id="6" name="TextBox 5"/>
-          <p:cNvSpPr txBox="1"/>
-          <p:nvPr/>
-        </p:nvSpPr>
-        <p:spPr>
-          <a:xfrm>
-            <a:off x="685800" y="1170432"/>
-            <a:ext cx="7772400" cy="274320"/>
-          </a:xfrm>
-          <a:prstGeom prst="rect">
-            <a:avLst/>
-          </a:prstGeom>
-          <a:noFill/>
-          <a:effectLst/>
-        </p:spPr>
-        <p:txBody>
-          <a:bodyPr wrap="square" anchor="t" lIns="0" rIns="0" tIns="0" bIns="0">
-            <a:spAutoFit/>
-          </a:bodyPr>
-          <a:lstStyle/>
-          <a:p>
-            <a:pPr algn="l">
-              <a:lnSpc>
-                <a:spcPct val="125000"/>
-              </a:lnSpc>
-              <a:spcAft>
-                <a:spcPts val="0"/>
-              </a:spcAft>
-            </a:pPr>
-            <a:r>
-              <a:rPr sz="1600" b="1" i="0">
-                <a:solidFill>
-                  <a:srgbClr val="34322F"/>
-                </a:solidFill>
-                <a:latin typeface="Libre Caslon Display"/>
-              </a:rPr>
-              <a:t>Question 1:  Who is saying it?</a:t>
-            </a:r>
-          </a:p>
-        </p:txBody>
-      </p:sp>
-      <p:sp>
-        <p:nvSpPr>
-          <p:cNvPr id="7" name="Rectangle 6"/>
-          <p:cNvSpPr/>
-          <p:nvPr/>
-        </p:nvSpPr>
-        <p:spPr>
-          <a:xfrm>
-            <a:off x="685800" y="1609344"/>
-            <a:ext cx="7772400" cy="1249680"/>
-          </a:xfrm>
-          <a:prstGeom prst="rect">
-            <a:avLst/>
-          </a:prstGeom>
-          <a:solidFill>
-            <a:srgbClr val="FFFFFF"/>
-          </a:solidFill>
-          <a:ln>
-            <a:noFill/>
-          </a:ln>
-          <a:effectLst/>
-        </p:spPr>
-        <p:style>
-          <a:lnRef idx="1">
-            <a:schemeClr val="accent1"/>
-          </a:lnRef>
-          <a:fillRef idx="3">
-            <a:schemeClr val="accent1"/>
-          </a:fillRef>
-          <a:effectRef idx="0">
-            <a:schemeClr val="accent1"/>
-          </a:effectRef>
-          <a:fontRef idx="minor">
-            <a:schemeClr val="lt1"/>
-          </a:fontRef>
-        </p:style>
-        <p:txBody>
-          <a:bodyPr rtlCol="0" anchor="ctr"/>
-          <a:lstStyle/>
-          <a:p>
-            <a:pPr algn="ctr"/>
-          </a:p>
-        </p:txBody>
-      </p:sp>
-      <p:sp>
-        <p:nvSpPr>
-          <p:cNvPr id="8" name="Rectangle 7"/>
-          <p:cNvSpPr/>
-          <p:nvPr/>
-        </p:nvSpPr>
-        <p:spPr>
-          <a:xfrm>
-            <a:off x="685800" y="1609344"/>
-            <a:ext cx="45720" cy="1249680"/>
-          </a:xfrm>
-          <a:prstGeom prst="rect">
-            <a:avLst/>
-          </a:prstGeom>
-          <a:solidFill>
-            <a:srgbClr val="34322F"/>
-          </a:solidFill>
-          <a:ln>
-            <a:noFill/>
-          </a:ln>
-          <a:effectLst/>
-        </p:spPr>
-        <p:style>
-          <a:lnRef idx="1">
-            <a:schemeClr val="accent1"/>
-          </a:lnRef>
-          <a:fillRef idx="3">
-            <a:schemeClr val="accent1"/>
-          </a:fillRef>
-          <a:effectRef idx="0">
-            <a:schemeClr val="accent1"/>
-          </a:effectRef>
-          <a:fontRef idx="minor">
-            <a:schemeClr val="lt1"/>
-          </a:fontRef>
-        </p:style>
-        <p:txBody>
           <a:bodyPr rtlCol="0" anchor="ctr"/>
           <a:lstStyle/>
           <a:p>
@@ -17801,7 +17361,7 @@
                 <a:solidFill>
                   <a:srgbClr val="262422"/>
                 </a:solidFill>
-                <a:latin typeface="Karla"/>
+                <a:latin typeface="Calibri"/>
               </a:rPr>
               <a:t>The company that makes Camels. It says it asked over a hundred thousand doctors, but not how it asked them, or what they were given first.</a:t>
             </a:r>
@@ -17844,7 +17404,7 @@
                 <a:solidFill>
                   <a:srgbClr val="56524B"/>
                 </a:solidFill>
-                <a:latin typeface="Karla"/>
+                <a:latin typeface="Calibri"/>
               </a:rPr>
               <a:t>Notice the answer is not true or false. It tells you what to look for next.</a:t>
             </a:r>
@@ -17912,7 +17472,7 @@
                 <a:solidFill>
                   <a:srgbClr val="8C877D"/>
                 </a:solidFill>
-                <a:latin typeface="Karla"/>
+                <a:latin typeface="Calibri"/>
               </a:rPr>
               <a:t>The Pastoral Guide</a:t>
             </a:r>
@@ -17955,7 +17515,7 @@
                 <a:solidFill>
                   <a:srgbClr val="8C877D"/>
                 </a:solidFill>
-                <a:latin typeface="Karla"/>
+                <a:latin typeface="Calibri"/>
               </a:rPr>
               <a:t>6 / 19</a:t>
             </a:r>
@@ -18060,64 +17620,9 @@
                 <a:solidFill>
                   <a:srgbClr val="34322F"/>
                 </a:solidFill>
-                <a:latin typeface="Karla"/>
+                <a:latin typeface="Calibri"/>
               </a:rPr>
               <a:t>QUESTION THE HEADLINE  ·  LESSON 3 OF 5</a:t>
-            </a:r>
-          </a:p>
-        </p:txBody>
-      </p:sp>
-      <p:sp>
-        <p:nvSpPr>
-          <p:cNvPr id="4" name="Rounded Rectangle 3"/>
-          <p:cNvSpPr/>
-          <p:nvPr/>
-        </p:nvSpPr>
-        <p:spPr>
-          <a:xfrm>
-            <a:off x="7356624" y="246888"/>
-            <a:ext cx="1101575" cy="237744"/>
-          </a:xfrm>
-          <a:prstGeom prst="roundRect">
-            <a:avLst>
-              <a:gd name="adj" fmla="val 50000"/>
-            </a:avLst>
-          </a:prstGeom>
-          <a:solidFill>
-            <a:srgbClr val="34322F"/>
-          </a:solidFill>
-          <a:ln>
-            <a:noFill/>
-          </a:ln>
-          <a:effectLst/>
-        </p:spPr>
-        <p:style>
-          <a:lnRef idx="1">
-            <a:schemeClr val="accent1"/>
-          </a:lnRef>
-          <a:fillRef idx="3">
-            <a:schemeClr val="accent1"/>
-          </a:fillRef>
-          <a:effectRef idx="0">
-            <a:schemeClr val="accent1"/>
-          </a:effectRef>
-          <a:fontRef idx="minor">
-            <a:schemeClr val="lt1"/>
-          </a:fontRef>
-        </p:style>
-        <p:txBody>
-          <a:bodyPr rtlCol="0" anchor="ctr" wrap="none" lIns="0" rIns="0" tIns="0" bIns="0"/>
-          <a:lstStyle/>
-          <a:p>
-            <a:pPr algn="ctr"/>
-            <a:r>
-              <a:rPr sz="950" b="1" spc="90">
-                <a:solidFill>
-                  <a:srgbClr val="FFFDF7"/>
-                </a:solidFill>
-                <a:latin typeface="Karla"/>
-              </a:rPr>
-              <a:t>TOGETHER</a:t>
             </a:r>
           </a:p>
         </p:txBody>
@@ -18154,11 +17659,11 @@
               </a:spcAft>
             </a:pPr>
             <a:r>
-              <a:rPr sz="2800" b="1" i="0">
+              <a:rPr sz="2800" b="0" i="0">
                 <a:solidFill>
                   <a:srgbClr val="262422"/>
                 </a:solidFill>
-                <a:latin typeface="Libre Caslon Display"/>
+                <a:latin typeface="Georgia"/>
               </a:rPr>
               <a:t>Now the other four</a:t>
             </a:r>
@@ -18201,7 +17706,7 @@
                 <a:solidFill>
                   <a:srgbClr val="56524B"/>
                 </a:solidFill>
-                <a:latin typeface="Karla"/>
+                <a:latin typeface="Calibri"/>
               </a:rPr>
               <a:t>Can the front page answer them? Talk it through in your group.</a:t>
             </a:r>
@@ -18397,11 +17902,11 @@
               </a:spcAft>
             </a:pPr>
             <a:r>
-              <a:rPr sz="1300" b="1" i="0">
+              <a:rPr sz="1300" b="0" i="0">
                 <a:solidFill>
                   <a:srgbClr val="262422"/>
                 </a:solidFill>
-                <a:latin typeface="Libre Caslon Display"/>
+                <a:latin typeface="Georgia"/>
               </a:rPr>
               <a:t>Who gains if I believe it?</a:t>
             </a:r>
@@ -18597,11 +18102,11 @@
               </a:spcAft>
             </a:pPr>
             <a:r>
-              <a:rPr sz="1300" b="1" i="0">
+              <a:rPr sz="1300" b="0" i="0">
                 <a:solidFill>
                   <a:srgbClr val="262422"/>
                 </a:solidFill>
-                <a:latin typeface="Libre Caslon Display"/>
+                <a:latin typeface="Georgia"/>
               </a:rPr>
               <a:t>Who paid for it?</a:t>
             </a:r>
@@ -18797,11 +18302,11 @@
               </a:spcAft>
             </a:pPr>
             <a:r>
-              <a:rPr sz="1300" b="1" i="0">
+              <a:rPr sz="1300" b="0" i="0">
                 <a:solidFill>
                   <a:srgbClr val="262422"/>
                 </a:solidFill>
-                <a:latin typeface="Libre Caslon Display"/>
+                <a:latin typeface="Georgia"/>
               </a:rPr>
               <a:t>What is the evidence?</a:t>
             </a:r>
@@ -18997,11 +18502,11 @@
               </a:spcAft>
             </a:pPr>
             <a:r>
-              <a:rPr sz="1300" b="1" i="0">
+              <a:rPr sz="1300" b="0" i="0">
                 <a:solidFill>
                   <a:srgbClr val="262422"/>
                 </a:solidFill>
-                <a:latin typeface="Libre Caslon Display"/>
+                <a:latin typeface="Georgia"/>
               </a:rPr>
               <a:t>Has it been tested, and by whom?</a:t>
             </a:r>
@@ -19044,7 +18549,7 @@
                 <a:solidFill>
                   <a:srgbClr val="34322F"/>
                 </a:solidFill>
-                <a:latin typeface="Karla"/>
+                <a:latin typeface="Calibri"/>
               </a:rPr>
               <a:t>Then fill in the top of your evidence sheet: where you stand, and what you would need to know.</a:t>
             </a:r>
@@ -19112,7 +18617,7 @@
                 <a:solidFill>
                   <a:srgbClr val="8C877D"/>
                 </a:solidFill>
-                <a:latin typeface="Karla"/>
+                <a:latin typeface="Calibri"/>
               </a:rPr>
               <a:t>The Pastoral Guide</a:t>
             </a:r>
@@ -19155,7 +18660,7 @@
                 <a:solidFill>
                   <a:srgbClr val="8C877D"/>
                 </a:solidFill>
-                <a:latin typeface="Karla"/>
+                <a:latin typeface="Calibri"/>
               </a:rPr>
               <a:t>7 / 19</a:t>
             </a:r>
@@ -19260,7 +18765,7 @@
                 <a:solidFill>
                   <a:srgbClr val="34322F"/>
                 </a:solidFill>
-                <a:latin typeface="Karla"/>
+                <a:latin typeface="Calibri"/>
               </a:rPr>
               <a:t>QUESTION THE HEADLINE  ·  LESSON 3 OF 5</a:t>
             </a:r>
@@ -19315,7 +18820,7 @@
                 <a:solidFill>
                   <a:srgbClr val="FFFDF7"/>
                 </a:solidFill>
-                <a:latin typeface="Karla"/>
+                <a:latin typeface="Calibri"/>
               </a:rPr>
               <a:t>ROUND 1 OF 4</a:t>
             </a:r>
@@ -19402,7 +18907,7 @@
                 <a:solidFill>
                   <a:srgbClr val="FFFDF7"/>
                 </a:solidFill>
-                <a:latin typeface="Karla"/>
+                <a:latin typeface="Calibri"/>
               </a:rPr>
               <a:t>EVIDENCE A</a:t>
             </a:r>
@@ -19529,11 +19034,11 @@
               </a:spcAft>
             </a:pPr>
             <a:r>
-              <a:rPr sz="2200" b="1" i="0">
+              <a:rPr sz="2200" b="0" i="0">
                 <a:solidFill>
                   <a:srgbClr val="262422"/>
                 </a:solidFill>
-                <a:latin typeface="Libre Caslon Display"/>
+                <a:latin typeface="Georgia"/>
               </a:rPr>
               <a:t>The advert</a:t>
             </a:r>
@@ -19619,7 +19124,7 @@
                 <a:solidFill>
                   <a:srgbClr val="8C877D"/>
                 </a:solidFill>
-                <a:latin typeface="Karla"/>
+                <a:latin typeface="Calibri"/>
               </a:rPr>
               <a:t>Source: Center for the Study of Tobacco and Society, University of Alabama</a:t>
             </a:r>
@@ -19662,7 +19167,7 @@
                 <a:solidFill>
                   <a:srgbClr val="34322F"/>
                 </a:solidFill>
-                <a:latin typeface="Karla"/>
+                <a:latin typeface="Calibri"/>
               </a:rPr>
               <a:t>Read it as a group. Fill in the card A row on your evidence sheet, then move on the line.</a:t>
             </a:r>
@@ -19730,7 +19235,7 @@
                 <a:solidFill>
                   <a:srgbClr val="8C877D"/>
                 </a:solidFill>
-                <a:latin typeface="Karla"/>
+                <a:latin typeface="Calibri"/>
               </a:rPr>
               <a:t>The Pastoral Guide</a:t>
             </a:r>
@@ -19773,7 +19278,7 @@
                 <a:solidFill>
                   <a:srgbClr val="8C877D"/>
                 </a:solidFill>
-                <a:latin typeface="Karla"/>
+                <a:latin typeface="Calibri"/>
               </a:rPr>
               <a:t>8 / 19</a:t>
             </a:r>
@@ -19878,7 +19383,7 @@
                 <a:solidFill>
                   <a:srgbClr val="34322F"/>
                 </a:solidFill>
-                <a:latin typeface="Karla"/>
+                <a:latin typeface="Calibri"/>
               </a:rPr>
               <a:t>QUESTION THE HEADLINE  ·  LESSON 3 OF 5</a:t>
             </a:r>
@@ -19933,7 +19438,7 @@
                 <a:solidFill>
                   <a:srgbClr val="FFFDF7"/>
                 </a:solidFill>
-                <a:latin typeface="Karla"/>
+                <a:latin typeface="Calibri"/>
               </a:rPr>
               <a:t>ROUND 2 OF 4</a:t>
             </a:r>
@@ -20020,7 +19525,7 @@
                 <a:solidFill>
                   <a:srgbClr val="FFFDF7"/>
                 </a:solidFill>
-                <a:latin typeface="Karla"/>
+                <a:latin typeface="Calibri"/>
               </a:rPr>
               <a:t>EVIDENCE B</a:t>
             </a:r>
@@ -20147,11 +19652,11 @@
               </a:spcAft>
             </a:pPr>
             <a:r>
-              <a:rPr sz="2200" b="1" i="0">
+              <a:rPr sz="2200" b="0" i="0">
                 <a:solidFill>
                   <a:srgbClr val="262422"/>
                 </a:solidFill>
-                <a:latin typeface="Libre Caslon Display"/>
+                <a:latin typeface="Georgia"/>
               </a:rPr>
               <a:t>The survey</a:t>
             </a:r>
@@ -20237,7 +19742,7 @@
                 <a:solidFill>
                   <a:srgbClr val="8C877D"/>
                 </a:solidFill>
-                <a:latin typeface="Karla"/>
+                <a:latin typeface="Calibri"/>
               </a:rPr>
               <a:t>Source: History.com, 2018; CSTS, University of Alabama</a:t>
             </a:r>
@@ -20280,7 +19785,7 @@
                 <a:solidFill>
                   <a:srgbClr val="34322F"/>
                 </a:solidFill>
-                <a:latin typeface="Karla"/>
+                <a:latin typeface="Calibri"/>
               </a:rPr>
               <a:t>Read it as a group. Fill in the card B row on your evidence sheet, then move on the line.</a:t>
             </a:r>
@@ -20348,7 +19853,7 @@
                 <a:solidFill>
                   <a:srgbClr val="8C877D"/>
                 </a:solidFill>
-                <a:latin typeface="Karla"/>
+                <a:latin typeface="Calibri"/>
               </a:rPr>
               <a:t>The Pastoral Guide</a:t>
             </a:r>
@@ -20391,7 +19896,7 @@
                 <a:solidFill>
                   <a:srgbClr val="8C877D"/>
                 </a:solidFill>
-                <a:latin typeface="Karla"/>
+                <a:latin typeface="Calibri"/>
               </a:rPr>
               <a:t>9 / 19</a:t>
             </a:r>
